--- a/NLP-Group18.pptx
+++ b/NLP-Group18.pptx
@@ -118,13 +118,18 @@
       </a:defRPr>
     </a:lvl9pPr>
   </p:defaultTextStyle>
+  <p:extLst>
+    <p:ext uri="{EFAFB233-063F-42B5-8137-9DF3F51BA10A}">
+      <p15:sldGuideLst xmlns:p15="http://schemas.microsoft.com/office/powerpoint/2012/main"/>
+    </p:ext>
+  </p:extLst>
 </p:presentation>
 </file>
 
 <file path=ppt/revisionInfo.xml><?xml version="1.0" encoding="utf-8"?>
 <p1510:revInfo xmlns:a="http://schemas.openxmlformats.org/drawingml/2006/main" xmlns:r="http://schemas.openxmlformats.org/officeDocument/2006/relationships" xmlns:p1510="http://schemas.microsoft.com/office/powerpoint/2015/10/main">
   <p1510:revLst>
-    <p1510:client id="{F1AC5C9A-2EA0-491B-862E-05098A947950}" v="21" dt="2026-01-14T13:18:21.997"/>
+    <p1510:client id="{F1AC5C9A-2EA0-491B-862E-05098A947950}" v="39" dt="2026-01-15T11:17:49.107"/>
   </p1510:revLst>
 </p1510:revInfo>
 </file>
@@ -134,7 +139,7 @@
   <pc:docChgLst>
     <pc:chgData name="Sara Milla" userId="066c60c930f0ee7e" providerId="LiveId" clId="{F4F1AB15-4B12-4C7A-A7EC-7648ACBA0A6D}"/>
     <pc:docChg chg="custSel addSld delSld modSld sldOrd">
-      <pc:chgData name="Sara Milla" userId="066c60c930f0ee7e" providerId="LiveId" clId="{F4F1AB15-4B12-4C7A-A7EC-7648ACBA0A6D}" dt="2026-01-14T13:21:08.495" v="1738"/>
+      <pc:chgData name="Sara Milla" userId="066c60c930f0ee7e" providerId="LiveId" clId="{F4F1AB15-4B12-4C7A-A7EC-7648ACBA0A6D}" dt="2026-01-15T11:18:15.941" v="1875" actId="20577"/>
       <pc:docMkLst>
         <pc:docMk/>
       </pc:docMkLst>
@@ -335,7 +340,7 @@
         </pc:picChg>
       </pc:sldChg>
       <pc:sldChg chg="addSp delSp modSp new mod modClrScheme chgLayout modNotesTx">
-        <pc:chgData name="Sara Milla" userId="066c60c930f0ee7e" providerId="LiveId" clId="{F4F1AB15-4B12-4C7A-A7EC-7648ACBA0A6D}" dt="2026-01-14T13:16:45.836" v="1523" actId="20577"/>
+        <pc:chgData name="Sara Milla" userId="066c60c930f0ee7e" providerId="LiveId" clId="{F4F1AB15-4B12-4C7A-A7EC-7648ACBA0A6D}" dt="2026-01-15T11:18:15.941" v="1875" actId="20577"/>
         <pc:sldMkLst>
           <pc:docMk/>
           <pc:sldMk cId="761959663" sldId="259"/>
@@ -389,7 +394,7 @@
         </pc:sldMkLst>
       </pc:sldChg>
       <pc:sldChg chg="modSp new mod ord">
-        <pc:chgData name="Sara Milla" userId="066c60c930f0ee7e" providerId="LiveId" clId="{F4F1AB15-4B12-4C7A-A7EC-7648ACBA0A6D}" dt="2026-01-14T13:21:08.495" v="1738"/>
+        <pc:chgData name="Sara Milla" userId="066c60c930f0ee7e" providerId="LiveId" clId="{F4F1AB15-4B12-4C7A-A7EC-7648ACBA0A6D}" dt="2026-01-15T11:08:34.575" v="1844" actId="20577"/>
         <pc:sldMkLst>
           <pc:docMk/>
           <pc:sldMk cId="503200733" sldId="260"/>
@@ -402,9 +407,17 @@
             <ac:spMk id="2" creationId="{25656D23-FD4F-E499-ABCD-2AE337AC7B46}"/>
           </ac:spMkLst>
         </pc:spChg>
+        <pc:spChg chg="mod">
+          <ac:chgData name="Sara Milla" userId="066c60c930f0ee7e" providerId="LiveId" clId="{F4F1AB15-4B12-4C7A-A7EC-7648ACBA0A6D}" dt="2026-01-15T11:08:34.575" v="1844" actId="20577"/>
+          <ac:spMkLst>
+            <pc:docMk/>
+            <pc:sldMk cId="503200733" sldId="260"/>
+            <ac:spMk id="3" creationId="{2257A480-CA9E-C264-7386-B11C48ADCEF1}"/>
+          </ac:spMkLst>
+        </pc:spChg>
       </pc:sldChg>
       <pc:sldChg chg="modSp new mod">
-        <pc:chgData name="Sara Milla" userId="066c60c930f0ee7e" providerId="LiveId" clId="{F4F1AB15-4B12-4C7A-A7EC-7648ACBA0A6D}" dt="2026-01-14T13:14:09.931" v="1413" actId="20577"/>
+        <pc:chgData name="Sara Milla" userId="066c60c930f0ee7e" providerId="LiveId" clId="{F4F1AB15-4B12-4C7A-A7EC-7648ACBA0A6D}" dt="2026-01-15T11:08:48.556" v="1852" actId="20577"/>
         <pc:sldMkLst>
           <pc:docMk/>
           <pc:sldMk cId="1937129893" sldId="261"/>
@@ -417,9 +430,17 @@
             <ac:spMk id="2" creationId="{10592F5B-D74E-6F71-391A-4E9AC25D44C2}"/>
           </ac:spMkLst>
         </pc:spChg>
+        <pc:spChg chg="mod">
+          <ac:chgData name="Sara Milla" userId="066c60c930f0ee7e" providerId="LiveId" clId="{F4F1AB15-4B12-4C7A-A7EC-7648ACBA0A6D}" dt="2026-01-15T11:08:48.556" v="1852" actId="20577"/>
+          <ac:spMkLst>
+            <pc:docMk/>
+            <pc:sldMk cId="1937129893" sldId="261"/>
+            <ac:spMk id="3" creationId="{36EC89D7-DD20-5937-328F-2E0B6C652C4A}"/>
+          </ac:spMkLst>
+        </pc:spChg>
       </pc:sldChg>
-      <pc:sldChg chg="modSp new mod">
-        <pc:chgData name="Sara Milla" userId="066c60c930f0ee7e" providerId="LiveId" clId="{F4F1AB15-4B12-4C7A-A7EC-7648ACBA0A6D}" dt="2026-01-14T13:14:17.026" v="1421" actId="20577"/>
+      <pc:sldChg chg="modSp new mod ord">
+        <pc:chgData name="Sara Milla" userId="066c60c930f0ee7e" providerId="LiveId" clId="{F4F1AB15-4B12-4C7A-A7EC-7648ACBA0A6D}" dt="2026-01-15T11:08:40.203" v="1846" actId="20577"/>
         <pc:sldMkLst>
           <pc:docMk/>
           <pc:sldMk cId="4071232228" sldId="262"/>
@@ -430,6 +451,14 @@
             <pc:docMk/>
             <pc:sldMk cId="4071232228" sldId="262"/>
             <ac:spMk id="2" creationId="{4E4C7D5F-306B-5BE3-502F-D530DC747F9A}"/>
+          </ac:spMkLst>
+        </pc:spChg>
+        <pc:spChg chg="mod">
+          <ac:chgData name="Sara Milla" userId="066c60c930f0ee7e" providerId="LiveId" clId="{F4F1AB15-4B12-4C7A-A7EC-7648ACBA0A6D}" dt="2026-01-15T11:08:40.203" v="1846" actId="20577"/>
+          <ac:spMkLst>
+            <pc:docMk/>
+            <pc:sldMk cId="4071232228" sldId="262"/>
+            <ac:spMk id="3" creationId="{706F5C72-7D77-128C-1796-65FCBF78FFAB}"/>
           </ac:spMkLst>
         </pc:spChg>
       </pc:sldChg>
@@ -449,7 +478,7 @@
         </pc:spChg>
       </pc:sldChg>
       <pc:sldChg chg="modSp new mod">
-        <pc:chgData name="Sara Milla" userId="066c60c930f0ee7e" providerId="LiveId" clId="{F4F1AB15-4B12-4C7A-A7EC-7648ACBA0A6D}" dt="2026-01-14T13:17:38.780" v="1543" actId="20577"/>
+        <pc:chgData name="Sara Milla" userId="066c60c930f0ee7e" providerId="LiveId" clId="{F4F1AB15-4B12-4C7A-A7EC-7648ACBA0A6D}" dt="2026-01-15T11:08:28.587" v="1840" actId="20577"/>
         <pc:sldMkLst>
           <pc:docMk/>
           <pc:sldMk cId="1148987645" sldId="264"/>
@@ -462,9 +491,17 @@
             <ac:spMk id="2" creationId="{C3254D78-9B28-FD7C-4604-EC32EB30F658}"/>
           </ac:spMkLst>
         </pc:spChg>
+        <pc:spChg chg="mod">
+          <ac:chgData name="Sara Milla" userId="066c60c930f0ee7e" providerId="LiveId" clId="{F4F1AB15-4B12-4C7A-A7EC-7648ACBA0A6D}" dt="2026-01-15T11:08:28.587" v="1840" actId="20577"/>
+          <ac:spMkLst>
+            <pc:docMk/>
+            <pc:sldMk cId="1148987645" sldId="264"/>
+            <ac:spMk id="3" creationId="{D17C41B8-5975-6BB8-1755-D6D2D00064AA}"/>
+          </ac:spMkLst>
+        </pc:spChg>
       </pc:sldChg>
       <pc:sldChg chg="addSp delSp modSp new mod">
-        <pc:chgData name="Sara Milla" userId="066c60c930f0ee7e" providerId="LiveId" clId="{F4F1AB15-4B12-4C7A-A7EC-7648ACBA0A6D}" dt="2026-01-14T13:19:17.388" v="1692" actId="20577"/>
+        <pc:chgData name="Sara Milla" userId="066c60c930f0ee7e" providerId="LiveId" clId="{F4F1AB15-4B12-4C7A-A7EC-7648ACBA0A6D}" dt="2026-01-15T11:08:16.402" v="1834" actId="20577"/>
         <pc:sldMkLst>
           <pc:docMk/>
           <pc:sldMk cId="1168996411" sldId="265"/>
@@ -478,7 +515,7 @@
           </ac:spMkLst>
         </pc:spChg>
         <pc:spChg chg="add del mod">
-          <ac:chgData name="Sara Milla" userId="066c60c930f0ee7e" providerId="LiveId" clId="{F4F1AB15-4B12-4C7A-A7EC-7648ACBA0A6D}" dt="2026-01-14T13:19:17.388" v="1692" actId="20577"/>
+          <ac:chgData name="Sara Milla" userId="066c60c930f0ee7e" providerId="LiveId" clId="{F4F1AB15-4B12-4C7A-A7EC-7648ACBA0A6D}" dt="2026-01-15T11:08:16.402" v="1834" actId="20577"/>
           <ac:spMkLst>
             <pc:docMk/>
             <pc:sldMk cId="1168996411" sldId="265"/>
@@ -495,11 +532,19 @@
         </pc:spChg>
       </pc:sldChg>
       <pc:sldChg chg="addSp delSp modSp new mod modClrScheme chgLayout">
-        <pc:chgData name="Sara Milla" userId="066c60c930f0ee7e" providerId="LiveId" clId="{F4F1AB15-4B12-4C7A-A7EC-7648ACBA0A6D}" dt="2026-01-14T13:19:58.417" v="1703" actId="20577"/>
+        <pc:chgData name="Sara Milla" userId="066c60c930f0ee7e" providerId="LiveId" clId="{F4F1AB15-4B12-4C7A-A7EC-7648ACBA0A6D}" dt="2026-01-15T11:09:26.106" v="1853" actId="700"/>
         <pc:sldMkLst>
           <pc:docMk/>
           <pc:sldMk cId="1838506366" sldId="266"/>
         </pc:sldMkLst>
+        <pc:spChg chg="add mod ord">
+          <ac:chgData name="Sara Milla" userId="066c60c930f0ee7e" providerId="LiveId" clId="{F4F1AB15-4B12-4C7A-A7EC-7648ACBA0A6D}" dt="2026-01-15T11:09:26.106" v="1853" actId="700"/>
+          <ac:spMkLst>
+            <pc:docMk/>
+            <pc:sldMk cId="1838506366" sldId="266"/>
+            <ac:spMk id="2" creationId="{06D479E7-D24D-BB51-903A-AAE37A8501E7}"/>
+          </ac:spMkLst>
+        </pc:spChg>
         <pc:spChg chg="del mod ord">
           <ac:chgData name="Sara Milla" userId="066c60c930f0ee7e" providerId="LiveId" clId="{F4F1AB15-4B12-4C7A-A7EC-7648ACBA0A6D}" dt="2026-01-14T13:19:54.811" v="1696" actId="700"/>
           <ac:spMkLst>
@@ -517,23 +562,23 @@
           </ac:spMkLst>
         </pc:spChg>
         <pc:spChg chg="add mod ord">
-          <ac:chgData name="Sara Milla" userId="066c60c930f0ee7e" providerId="LiveId" clId="{F4F1AB15-4B12-4C7A-A7EC-7648ACBA0A6D}" dt="2026-01-14T13:19:58.417" v="1703" actId="20577"/>
+          <ac:chgData name="Sara Milla" userId="066c60c930f0ee7e" providerId="LiveId" clId="{F4F1AB15-4B12-4C7A-A7EC-7648ACBA0A6D}" dt="2026-01-15T11:09:26.106" v="1853" actId="700"/>
           <ac:spMkLst>
             <pc:docMk/>
             <pc:sldMk cId="1838506366" sldId="266"/>
             <ac:spMk id="4" creationId="{B7ABD7DE-0ECE-BC87-DCD0-C57565CE6078}"/>
           </ac:spMkLst>
         </pc:spChg>
-        <pc:spChg chg="add mod ord">
-          <ac:chgData name="Sara Milla" userId="066c60c930f0ee7e" providerId="LiveId" clId="{F4F1AB15-4B12-4C7A-A7EC-7648ACBA0A6D}" dt="2026-01-14T13:19:54.811" v="1696" actId="700"/>
+        <pc:spChg chg="add del mod ord">
+          <ac:chgData name="Sara Milla" userId="066c60c930f0ee7e" providerId="LiveId" clId="{F4F1AB15-4B12-4C7A-A7EC-7648ACBA0A6D}" dt="2026-01-15T11:09:26.106" v="1853" actId="700"/>
           <ac:spMkLst>
             <pc:docMk/>
             <pc:sldMk cId="1838506366" sldId="266"/>
             <ac:spMk id="5" creationId="{A74627F8-3F47-42F2-EF8E-9F2354A358BE}"/>
           </ac:spMkLst>
         </pc:spChg>
-        <pc:spChg chg="add mod ord">
-          <ac:chgData name="Sara Milla" userId="066c60c930f0ee7e" providerId="LiveId" clId="{F4F1AB15-4B12-4C7A-A7EC-7648ACBA0A6D}" dt="2026-01-14T13:19:54.811" v="1696" actId="700"/>
+        <pc:spChg chg="add del mod ord">
+          <ac:chgData name="Sara Milla" userId="066c60c930f0ee7e" providerId="LiveId" clId="{F4F1AB15-4B12-4C7A-A7EC-7648ACBA0A6D}" dt="2026-01-15T11:09:26.106" v="1853" actId="700"/>
           <ac:spMkLst>
             <pc:docMk/>
             <pc:sldMk cId="1838506366" sldId="266"/>
@@ -3069,7 +3114,7 @@
           <a:p>
             <a:fld id="{AC48ED49-0C8E-493D-9073-2686AA266E1A}" type="datetimeFigureOut">
               <a:rPr lang="en-US" smtClean="0"/>
-              <a:t>1/14/2026</a:t>
+              <a:t>1/15/2026</a:t>
             </a:fld>
             <a:endParaRPr lang="en-US"/>
           </a:p>
@@ -3573,6 +3618,20 @@
               <a:t>-splits the text into 2000 char blocks with a 100 character overlap</a:t>
             </a:r>
           </a:p>
+          <a:p>
+            <a:r>
+              <a:rPr lang="en-US" dirty="0"/>
+              <a:t>-The pipeline predicts entities within each chunk, and the code filters these results to retain only those categorized </a:t>
+            </a:r>
+            <a:r>
+              <a:rPr lang="en-US"/>
+              <a:t>as persons </a:t>
+            </a:r>
+            <a:r>
+              <a:rPr lang="en-US" dirty="0"/>
+              <a:t>or organizations.</a:t>
+            </a:r>
+          </a:p>
         </p:txBody>
       </p:sp>
       <p:sp>
@@ -3612,6 +3671,90 @@
 </file>
 
 <file path=ppt/notesSlides/notesSlide4.xml><?xml version="1.0" encoding="utf-8"?>
+<p:notes xmlns:a="http://schemas.openxmlformats.org/drawingml/2006/main" xmlns:r="http://schemas.openxmlformats.org/officeDocument/2006/relationships" xmlns:p="http://schemas.openxmlformats.org/presentationml/2006/main">
+  <p:cSld>
+    <p:spTree>
+      <p:nvGrpSpPr>
+        <p:cNvPr id="1" name=""/>
+        <p:cNvGrpSpPr/>
+        <p:nvPr/>
+      </p:nvGrpSpPr>
+      <p:grpSpPr>
+        <a:xfrm>
+          <a:off x="0" y="0"/>
+          <a:ext cx="0" cy="0"/>
+          <a:chOff x="0" y="0"/>
+          <a:chExt cx="0" cy="0"/>
+        </a:xfrm>
+      </p:grpSpPr>
+      <p:sp>
+        <p:nvSpPr>
+          <p:cNvPr id="2" name="Slide Image Placeholder 1"/>
+          <p:cNvSpPr>
+            <a:spLocks noGrp="1" noRot="1" noChangeAspect="1"/>
+          </p:cNvSpPr>
+          <p:nvPr>
+            <p:ph type="sldImg"/>
+          </p:nvPr>
+        </p:nvSpPr>
+        <p:spPr/>
+      </p:sp>
+      <p:sp>
+        <p:nvSpPr>
+          <p:cNvPr id="3" name="Notes Placeholder 2"/>
+          <p:cNvSpPr>
+            <a:spLocks noGrp="1"/>
+          </p:cNvSpPr>
+          <p:nvPr>
+            <p:ph type="body" idx="1"/>
+          </p:nvPr>
+        </p:nvSpPr>
+        <p:spPr/>
+        <p:txBody>
+          <a:bodyPr/>
+          <a:lstStyle/>
+          <a:p>
+            <a:endParaRPr lang="en-US" dirty="0"/>
+          </a:p>
+        </p:txBody>
+      </p:sp>
+      <p:sp>
+        <p:nvSpPr>
+          <p:cNvPr id="4" name="Slide Number Placeholder 3"/>
+          <p:cNvSpPr>
+            <a:spLocks noGrp="1"/>
+          </p:cNvSpPr>
+          <p:nvPr>
+            <p:ph type="sldNum" sz="quarter" idx="5"/>
+          </p:nvPr>
+        </p:nvSpPr>
+        <p:spPr/>
+        <p:txBody>
+          <a:bodyPr/>
+          <a:lstStyle/>
+          <a:p>
+            <a:fld id="{3995E981-1EFA-47B5-8159-159ED2728D9A}" type="slidenum">
+              <a:rPr lang="en-US" smtClean="0"/>
+              <a:t>11</a:t>
+            </a:fld>
+            <a:endParaRPr lang="en-US"/>
+          </a:p>
+        </p:txBody>
+      </p:sp>
+    </p:spTree>
+    <p:extLst>
+      <p:ext uri="{BB962C8B-B14F-4D97-AF65-F5344CB8AC3E}">
+        <p14:creationId xmlns:p14="http://schemas.microsoft.com/office/powerpoint/2010/main" val="2016048580"/>
+      </p:ext>
+    </p:extLst>
+  </p:cSld>
+  <p:clrMapOvr>
+    <a:masterClrMapping/>
+  </p:clrMapOvr>
+</p:notes>
+</file>
+
+<file path=ppt/notesSlides/notesSlide5.xml><?xml version="1.0" encoding="utf-8"?>
 <p:notes xmlns:a="http://schemas.openxmlformats.org/drawingml/2006/main" xmlns:r="http://schemas.openxmlformats.org/officeDocument/2006/relationships" xmlns:p="http://schemas.openxmlformats.org/presentationml/2006/main">
   <p:cSld>
     <p:spTree>
@@ -3842,7 +3985,7 @@
           <a:p>
             <a:fld id="{A35C02C4-59AA-486A-B0DF-96F10EC02CBF}" type="datetimeFigureOut">
               <a:rPr lang="en-US" smtClean="0"/>
-              <a:t>1/14/2026</a:t>
+              <a:t>1/15/2026</a:t>
             </a:fld>
             <a:endParaRPr lang="en-US"/>
           </a:p>
@@ -4040,7 +4183,7 @@
           <a:p>
             <a:fld id="{A35C02C4-59AA-486A-B0DF-96F10EC02CBF}" type="datetimeFigureOut">
               <a:rPr lang="en-US" smtClean="0"/>
-              <a:t>1/14/2026</a:t>
+              <a:t>1/15/2026</a:t>
             </a:fld>
             <a:endParaRPr lang="en-US"/>
           </a:p>
@@ -4248,7 +4391,7 @@
           <a:p>
             <a:fld id="{A35C02C4-59AA-486A-B0DF-96F10EC02CBF}" type="datetimeFigureOut">
               <a:rPr lang="en-US" smtClean="0"/>
-              <a:t>1/14/2026</a:t>
+              <a:t>1/15/2026</a:t>
             </a:fld>
             <a:endParaRPr lang="en-US"/>
           </a:p>
@@ -4446,7 +4589,7 @@
           <a:p>
             <a:fld id="{A35C02C4-59AA-486A-B0DF-96F10EC02CBF}" type="datetimeFigureOut">
               <a:rPr lang="en-US" smtClean="0"/>
-              <a:t>1/14/2026</a:t>
+              <a:t>1/15/2026</a:t>
             </a:fld>
             <a:endParaRPr lang="en-US"/>
           </a:p>
@@ -4721,7 +4864,7 @@
           <a:p>
             <a:fld id="{A35C02C4-59AA-486A-B0DF-96F10EC02CBF}" type="datetimeFigureOut">
               <a:rPr lang="en-US" smtClean="0"/>
-              <a:t>1/14/2026</a:t>
+              <a:t>1/15/2026</a:t>
             </a:fld>
             <a:endParaRPr lang="en-US"/>
           </a:p>
@@ -4986,7 +5129,7 @@
           <a:p>
             <a:fld id="{A35C02C4-59AA-486A-B0DF-96F10EC02CBF}" type="datetimeFigureOut">
               <a:rPr lang="en-US" smtClean="0"/>
-              <a:t>1/14/2026</a:t>
+              <a:t>1/15/2026</a:t>
             </a:fld>
             <a:endParaRPr lang="en-US"/>
           </a:p>
@@ -5398,7 +5541,7 @@
           <a:p>
             <a:fld id="{A35C02C4-59AA-486A-B0DF-96F10EC02CBF}" type="datetimeFigureOut">
               <a:rPr lang="en-US" smtClean="0"/>
-              <a:t>1/14/2026</a:t>
+              <a:t>1/15/2026</a:t>
             </a:fld>
             <a:endParaRPr lang="en-US"/>
           </a:p>
@@ -5539,7 +5682,7 @@
           <a:p>
             <a:fld id="{A35C02C4-59AA-486A-B0DF-96F10EC02CBF}" type="datetimeFigureOut">
               <a:rPr lang="en-US" smtClean="0"/>
-              <a:t>1/14/2026</a:t>
+              <a:t>1/15/2026</a:t>
             </a:fld>
             <a:endParaRPr lang="en-US"/>
           </a:p>
@@ -5652,7 +5795,7 @@
           <a:p>
             <a:fld id="{A35C02C4-59AA-486A-B0DF-96F10EC02CBF}" type="datetimeFigureOut">
               <a:rPr lang="en-US" smtClean="0"/>
-              <a:t>1/14/2026</a:t>
+              <a:t>1/15/2026</a:t>
             </a:fld>
             <a:endParaRPr lang="en-US"/>
           </a:p>
@@ -5963,7 +6106,7 @@
           <a:p>
             <a:fld id="{A35C02C4-59AA-486A-B0DF-96F10EC02CBF}" type="datetimeFigureOut">
               <a:rPr lang="en-US" smtClean="0"/>
-              <a:t>1/14/2026</a:t>
+              <a:t>1/15/2026</a:t>
             </a:fld>
             <a:endParaRPr lang="en-US"/>
           </a:p>
@@ -6251,7 +6394,7 @@
           <a:p>
             <a:fld id="{A35C02C4-59AA-486A-B0DF-96F10EC02CBF}" type="datetimeFigureOut">
               <a:rPr lang="en-US" smtClean="0"/>
-              <a:t>1/14/2026</a:t>
+              <a:t>1/15/2026</a:t>
             </a:fld>
             <a:endParaRPr lang="en-US"/>
           </a:p>
@@ -6492,7 +6635,7 @@
           <a:p>
             <a:fld id="{A35C02C4-59AA-486A-B0DF-96F10EC02CBF}" type="datetimeFigureOut">
               <a:rPr lang="en-US" smtClean="0"/>
-              <a:t>1/14/2026</a:t>
+              <a:t>1/15/2026</a:t>
             </a:fld>
             <a:endParaRPr lang="en-US"/>
           </a:p>
@@ -7624,13 +7767,25 @@
           <a:p>
             <a:r>
               <a:rPr lang="en-US" dirty="0"/>
-              <a:t>Precision, Recall, Macro-F1 Score</a:t>
+              <a:t>Precision, Recall, Macro-F1 Score – calculated per label</a:t>
             </a:r>
           </a:p>
           <a:p>
             <a:r>
               <a:rPr lang="en-US" dirty="0"/>
               <a:t>Exact span matching: an entity is TP if start, end, and label match the ground truth perfectly</a:t>
+            </a:r>
+          </a:p>
+          <a:p>
+            <a:r>
+              <a:rPr lang="en-US" dirty="0"/>
+              <a:t>A custom script (evaluate_results.py) compares the JSON output of each model against the parsed XMI gold standard file</a:t>
+            </a:r>
+          </a:p>
+          <a:p>
+            <a:r>
+              <a:rPr lang="en-US" dirty="0"/>
+              <a:t>Penalizes even partial matches, ensuring our models are precise on exact entity boundaries</a:t>
             </a:r>
           </a:p>
         </p:txBody>
@@ -7695,10 +7850,10 @@
       </p:sp>
       <p:sp>
         <p:nvSpPr>
-          <p:cNvPr id="5" name="Content Placeholder 4">
+          <p:cNvPr id="2" name="Content Placeholder 1">
             <a:extLst>
               <a:ext uri="{FF2B5EF4-FFF2-40B4-BE49-F238E27FC236}">
-                <a16:creationId xmlns:a16="http://schemas.microsoft.com/office/drawing/2014/main" id="{A74627F8-3F47-42F2-EF8E-9F2354A358BE}"/>
+                <a16:creationId xmlns:a16="http://schemas.microsoft.com/office/drawing/2014/main" id="{06D479E7-D24D-BB51-903A-AAE37A8501E7}"/>
               </a:ext>
             </a:extLst>
           </p:cNvPr>
@@ -7706,32 +7861,7 @@
             <a:spLocks noGrp="1"/>
           </p:cNvSpPr>
           <p:nvPr>
-            <p:ph sz="half" idx="1"/>
-          </p:nvPr>
-        </p:nvSpPr>
-        <p:spPr/>
-        <p:txBody>
-          <a:bodyPr/>
-          <a:lstStyle/>
-          <a:p>
-            <a:endParaRPr lang="en-US"/>
-          </a:p>
-        </p:txBody>
-      </p:sp>
-      <p:sp>
-        <p:nvSpPr>
-          <p:cNvPr id="6" name="Content Placeholder 5">
-            <a:extLst>
-              <a:ext uri="{FF2B5EF4-FFF2-40B4-BE49-F238E27FC236}">
-                <a16:creationId xmlns:a16="http://schemas.microsoft.com/office/drawing/2014/main" id="{BCAFB7C4-B032-0442-2F51-747E7D521190}"/>
-              </a:ext>
-            </a:extLst>
-          </p:cNvPr>
-          <p:cNvSpPr>
-            <a:spLocks noGrp="1"/>
-          </p:cNvSpPr>
-          <p:nvPr>
-            <p:ph sz="half" idx="2"/>
+            <p:ph idx="1"/>
           </p:nvPr>
         </p:nvSpPr>
         <p:spPr/>
@@ -8468,7 +8598,68 @@
           <a:bodyPr/>
           <a:lstStyle/>
           <a:p>
-            <a:endParaRPr lang="en-US"/>
+            <a:r>
+              <a:rPr lang="en-US" dirty="0"/>
+              <a:t>flair/</a:t>
+            </a:r>
+            <a:r>
+              <a:rPr lang="en-US" dirty="0" err="1"/>
+              <a:t>ner</a:t>
+            </a:r>
+            <a:r>
+              <a:rPr lang="en-US" dirty="0"/>
+              <a:t>-</a:t>
+            </a:r>
+            <a:r>
+              <a:rPr lang="en-US" dirty="0" err="1"/>
+              <a:t>german</a:t>
+            </a:r>
+            <a:r>
+              <a:rPr lang="en-US" dirty="0"/>
+              <a:t>-large: model based on contextual string embeddings and LSTM-CRF</a:t>
+            </a:r>
+          </a:p>
+          <a:p>
+            <a:r>
+              <a:rPr lang="en-US" dirty="0"/>
+              <a:t>Implementation wraps the Flair </a:t>
+            </a:r>
+            <a:r>
+              <a:rPr lang="en-US" dirty="0" err="1"/>
+              <a:t>SequenceTagger</a:t>
+            </a:r>
+            <a:r>
+              <a:rPr lang="en-US" dirty="0"/>
+              <a:t> in a custom class to standardize outputs into our Entity format</a:t>
+            </a:r>
+          </a:p>
+          <a:p>
+            <a:r>
+              <a:rPr lang="en-US" dirty="0"/>
+              <a:t>Predicts on Sentence objects, and we iterate through </a:t>
+            </a:r>
+            <a:r>
+              <a:rPr lang="en-US" dirty="0" err="1"/>
+              <a:t>sentence.get_spans</a:t>
+            </a:r>
+            <a:r>
+              <a:rPr lang="en-US" dirty="0"/>
+              <a:t>("</a:t>
+            </a:r>
+            <a:r>
+              <a:rPr lang="en-US" dirty="0" err="1"/>
+              <a:t>ner</a:t>
+            </a:r>
+            <a:r>
+              <a:rPr lang="en-US" dirty="0"/>
+              <a:t>") to extract labels</a:t>
+            </a:r>
+          </a:p>
+          <a:p>
+            <a:r>
+              <a:rPr lang="en-US" dirty="0"/>
+              <a:t>Recurrent network architecture</a:t>
+            </a:r>
           </a:p>
         </p:txBody>
       </p:sp>
@@ -8552,7 +8743,42 @@
           <a:bodyPr/>
           <a:lstStyle/>
           <a:p>
-            <a:endParaRPr lang="en-US"/>
+            <a:r>
+              <a:rPr lang="en-US" dirty="0" err="1"/>
+              <a:t>de_core_news_md</a:t>
+            </a:r>
+            <a:endParaRPr lang="en-US" dirty="0"/>
+          </a:p>
+          <a:p>
+            <a:r>
+              <a:rPr lang="en-US" dirty="0"/>
+              <a:t>Handling large files: manually increased </a:t>
+            </a:r>
+            <a:r>
+              <a:rPr lang="en-US" dirty="0" err="1"/>
+              <a:t>nlp.max_length</a:t>
+            </a:r>
+            <a:r>
+              <a:rPr lang="en-US" dirty="0"/>
+              <a:t> to 3,000,000 characters to prevent overflow errors</a:t>
+            </a:r>
+          </a:p>
+          <a:p>
+            <a:r>
+              <a:rPr lang="en-US" dirty="0"/>
+              <a:t>Extracts entities by iterating over </a:t>
+            </a:r>
+            <a:r>
+              <a:rPr lang="en-US" dirty="0" err="1"/>
+              <a:t>doc.ents</a:t>
+            </a:r>
+            <a:r>
+              <a:rPr lang="en-US" dirty="0"/>
+              <a:t>, filtering only for PER and ORG labels</a:t>
+            </a:r>
+          </a:p>
+          <a:p>
+            <a:endParaRPr lang="en-US" dirty="0"/>
           </a:p>
         </p:txBody>
       </p:sp>
@@ -8635,7 +8861,52 @@
           <a:bodyPr/>
           <a:lstStyle/>
           <a:p>
-            <a:endParaRPr lang="en-US"/>
+            <a:r>
+              <a:rPr lang="en-US" dirty="0"/>
+              <a:t>Built a deterministic system using </a:t>
+            </a:r>
+            <a:r>
+              <a:rPr lang="en-US" dirty="0" err="1"/>
+              <a:t>SpaCy’s</a:t>
+            </a:r>
+            <a:r>
+              <a:rPr lang="en-US" dirty="0"/>
+              <a:t> </a:t>
+            </a:r>
+            <a:r>
+              <a:rPr lang="en-US" dirty="0" err="1"/>
+              <a:t>EntityRuler</a:t>
+            </a:r>
+            <a:r>
+              <a:rPr lang="en-US" dirty="0"/>
+              <a:t> combined with dynamic and static gazetteers</a:t>
+            </a:r>
+          </a:p>
+          <a:p>
+            <a:r>
+              <a:rPr lang="en-US" dirty="0"/>
+              <a:t>A script fetches the current list of MPs live from the Austrian Parliament API to ensure up-to-date Person recognition</a:t>
+            </a:r>
+          </a:p>
+          <a:p>
+            <a:r>
+              <a:rPr lang="en-US" dirty="0"/>
+              <a:t>Implemented a _</a:t>
+            </a:r>
+            <a:r>
+              <a:rPr lang="en-US" dirty="0" err="1"/>
+              <a:t>non_overlapping_spans</a:t>
+            </a:r>
+            <a:r>
+              <a:rPr lang="en-US" dirty="0"/>
+              <a:t> function to strictly enforce that longer matches (e.g., full ministry names) take priority</a:t>
+            </a:r>
+          </a:p>
+          <a:p>
+            <a:r>
+              <a:rPr lang="en-US" dirty="0"/>
+              <a:t>Static lists were hardcoded for stable organizations</a:t>
+            </a:r>
           </a:p>
         </p:txBody>
       </p:sp>
@@ -8805,7 +9076,52 @@
           <a:bodyPr/>
           <a:lstStyle/>
           <a:p>
-            <a:endParaRPr lang="en-US"/>
+            <a:r>
+              <a:rPr lang="en-US" dirty="0"/>
+              <a:t>Hybrid approach injects our custom </a:t>
+            </a:r>
+            <a:r>
+              <a:rPr lang="en-US" dirty="0" err="1"/>
+              <a:t>EntityRuler</a:t>
+            </a:r>
+            <a:r>
+              <a:rPr lang="en-US" dirty="0"/>
+              <a:t> component before the statistical </a:t>
+            </a:r>
+            <a:r>
+              <a:rPr lang="en-US" dirty="0" err="1"/>
+              <a:t>ner</a:t>
+            </a:r>
+            <a:r>
+              <a:rPr lang="en-US" dirty="0"/>
+              <a:t> component in the pipeline</a:t>
+            </a:r>
+          </a:p>
+          <a:p>
+            <a:r>
+              <a:rPr lang="en-US" dirty="0"/>
+              <a:t>Hard-coded patterns for known failures (e.g., "</a:t>
+            </a:r>
+            <a:r>
+              <a:rPr lang="en-US" dirty="0" err="1"/>
+              <a:t>Bundesministerium</a:t>
+            </a:r>
+            <a:r>
+              <a:rPr lang="en-US" dirty="0"/>
+              <a:t> für X") force the model to respect our domain knowledge first</a:t>
+            </a:r>
+          </a:p>
+          <a:p>
+            <a:r>
+              <a:rPr lang="en-US" dirty="0"/>
+              <a:t>Only predicts on the remaining text, effectively filling in the gaps left by the rules</a:t>
+            </a:r>
+          </a:p>
+          <a:p>
+            <a:r>
+              <a:rPr lang="en-US" dirty="0"/>
+              <a:t>Aims to fix high-frequency domain errors while keeping the generalization power of the machine learning model</a:t>
+            </a:r>
           </a:p>
         </p:txBody>
       </p:sp>

--- a/NLP-Group18.pptx
+++ b/NLP-Group18.pptx
@@ -5,7 +5,7 @@
     <p:sldMasterId id="2147483648" r:id="rId1"/>
   </p:sldMasterIdLst>
   <p:notesMasterIdLst>
-    <p:notesMasterId r:id="rId14"/>
+    <p:notesMasterId r:id="rId15"/>
   </p:notesMasterIdLst>
   <p:sldIdLst>
     <p:sldId id="256" r:id="rId2"/>
@@ -13,13 +13,14 @@
     <p:sldId id="258" r:id="rId4"/>
     <p:sldId id="259" r:id="rId5"/>
     <p:sldId id="261" r:id="rId6"/>
-    <p:sldId id="262" r:id="rId7"/>
-    <p:sldId id="260" r:id="rId8"/>
+    <p:sldId id="260" r:id="rId7"/>
+    <p:sldId id="262" r:id="rId8"/>
     <p:sldId id="263" r:id="rId9"/>
-    <p:sldId id="264" r:id="rId10"/>
-    <p:sldId id="265" r:id="rId11"/>
-    <p:sldId id="266" r:id="rId12"/>
-    <p:sldId id="267" r:id="rId13"/>
+    <p:sldId id="265" r:id="rId10"/>
+    <p:sldId id="266" r:id="rId11"/>
+    <p:sldId id="267" r:id="rId12"/>
+    <p:sldId id="268" r:id="rId13"/>
+    <p:sldId id="264" r:id="rId14"/>
   </p:sldIdLst>
   <p:sldSz cx="12192000" cy="6858000"/>
   <p:notesSz cx="6858000" cy="9144000"/>
@@ -139,7 +140,7 @@
   <pc:docChgLst>
     <pc:chgData name="Sara Milla" userId="066c60c930f0ee7e" providerId="LiveId" clId="{F4F1AB15-4B12-4C7A-A7EC-7648ACBA0A6D}"/>
     <pc:docChg chg="custSel addSld delSld modSld sldOrd">
-      <pc:chgData name="Sara Milla" userId="066c60c930f0ee7e" providerId="LiveId" clId="{F4F1AB15-4B12-4C7A-A7EC-7648ACBA0A6D}" dt="2026-01-15T11:18:15.941" v="1875" actId="20577"/>
+      <pc:chgData name="Sara Milla" userId="066c60c930f0ee7e" providerId="LiveId" clId="{F4F1AB15-4B12-4C7A-A7EC-7648ACBA0A6D}" dt="2026-01-15T15:01:14.541" v="2185" actId="20577"/>
       <pc:docMkLst>
         <pc:docMk/>
       </pc:docMkLst>
@@ -253,8 +254,8 @@
           </ac:spMkLst>
         </pc:spChg>
       </pc:sldChg>
-      <pc:sldChg chg="addSp delSp modSp new mod">
-        <pc:chgData name="Sara Milla" userId="066c60c930f0ee7e" providerId="LiveId" clId="{F4F1AB15-4B12-4C7A-A7EC-7648ACBA0A6D}" dt="2026-01-14T12:26:47.219" v="528" actId="113"/>
+      <pc:sldChg chg="addSp delSp modSp new mod modNotesTx">
+        <pc:chgData name="Sara Milla" userId="066c60c930f0ee7e" providerId="LiveId" clId="{F4F1AB15-4B12-4C7A-A7EC-7648ACBA0A6D}" dt="2026-01-15T14:42:38.989" v="1884" actId="20577"/>
         <pc:sldMkLst>
           <pc:docMk/>
           <pc:sldMk cId="2278827070" sldId="257"/>
@@ -292,8 +293,8 @@
           </ac:graphicFrameMkLst>
         </pc:graphicFrameChg>
       </pc:sldChg>
-      <pc:sldChg chg="addSp delSp modSp new mod">
-        <pc:chgData name="Sara Milla" userId="066c60c930f0ee7e" providerId="LiveId" clId="{F4F1AB15-4B12-4C7A-A7EC-7648ACBA0A6D}" dt="2026-01-14T12:40:53.518" v="937" actId="1036"/>
+      <pc:sldChg chg="addSp delSp modSp new mod modNotesTx">
+        <pc:chgData name="Sara Milla" userId="066c60c930f0ee7e" providerId="LiveId" clId="{F4F1AB15-4B12-4C7A-A7EC-7648ACBA0A6D}" dt="2026-01-15T14:42:41.842" v="1888" actId="20577"/>
         <pc:sldMkLst>
           <pc:docMk/>
           <pc:sldMk cId="742933904" sldId="258"/>
@@ -340,7 +341,7 @@
         </pc:picChg>
       </pc:sldChg>
       <pc:sldChg chg="addSp delSp modSp new mod modClrScheme chgLayout modNotesTx">
-        <pc:chgData name="Sara Milla" userId="066c60c930f0ee7e" providerId="LiveId" clId="{F4F1AB15-4B12-4C7A-A7EC-7648ACBA0A6D}" dt="2026-01-15T11:18:15.941" v="1875" actId="20577"/>
+        <pc:chgData name="Sara Milla" userId="066c60c930f0ee7e" providerId="LiveId" clId="{F4F1AB15-4B12-4C7A-A7EC-7648ACBA0A6D}" dt="2026-01-15T14:49:35.889" v="2168" actId="20577"/>
         <pc:sldMkLst>
           <pc:docMk/>
           <pc:sldMk cId="761959663" sldId="259"/>
@@ -354,7 +355,7 @@
           </ac:spMkLst>
         </pc:spChg>
         <pc:spChg chg="mod ord">
-          <ac:chgData name="Sara Milla" userId="066c60c930f0ee7e" providerId="LiveId" clId="{F4F1AB15-4B12-4C7A-A7EC-7648ACBA0A6D}" dt="2026-01-14T13:13:30.126" v="1394" actId="20577"/>
+          <ac:chgData name="Sara Milla" userId="066c60c930f0ee7e" providerId="LiveId" clId="{F4F1AB15-4B12-4C7A-A7EC-7648ACBA0A6D}" dt="2026-01-15T14:49:35.889" v="2168" actId="20577"/>
           <ac:spMkLst>
             <pc:docMk/>
             <pc:sldMk cId="761959663" sldId="259"/>
@@ -393,8 +394,8 @@
           <pc:sldMk cId="3781506995" sldId="259"/>
         </pc:sldMkLst>
       </pc:sldChg>
-      <pc:sldChg chg="modSp new mod ord">
-        <pc:chgData name="Sara Milla" userId="066c60c930f0ee7e" providerId="LiveId" clId="{F4F1AB15-4B12-4C7A-A7EC-7648ACBA0A6D}" dt="2026-01-15T11:08:34.575" v="1844" actId="20577"/>
+      <pc:sldChg chg="modSp new mod ord modNotesTx">
+        <pc:chgData name="Sara Milla" userId="066c60c930f0ee7e" providerId="LiveId" clId="{F4F1AB15-4B12-4C7A-A7EC-7648ACBA0A6D}" dt="2026-01-15T14:42:55.687" v="1908" actId="20577"/>
         <pc:sldMkLst>
           <pc:docMk/>
           <pc:sldMk cId="503200733" sldId="260"/>
@@ -416,8 +417,8 @@
           </ac:spMkLst>
         </pc:spChg>
       </pc:sldChg>
-      <pc:sldChg chg="modSp new mod">
-        <pc:chgData name="Sara Milla" userId="066c60c930f0ee7e" providerId="LiveId" clId="{F4F1AB15-4B12-4C7A-A7EC-7648ACBA0A6D}" dt="2026-01-15T11:08:48.556" v="1852" actId="20577"/>
+      <pc:sldChg chg="modSp new mod modNotesTx">
+        <pc:chgData name="Sara Milla" userId="066c60c930f0ee7e" providerId="LiveId" clId="{F4F1AB15-4B12-4C7A-A7EC-7648ACBA0A6D}" dt="2026-01-15T14:49:14.244" v="2146" actId="5793"/>
         <pc:sldMkLst>
           <pc:docMk/>
           <pc:sldMk cId="1937129893" sldId="261"/>
@@ -431,7 +432,7 @@
           </ac:spMkLst>
         </pc:spChg>
         <pc:spChg chg="mod">
-          <ac:chgData name="Sara Milla" userId="066c60c930f0ee7e" providerId="LiveId" clId="{F4F1AB15-4B12-4C7A-A7EC-7648ACBA0A6D}" dt="2026-01-15T11:08:48.556" v="1852" actId="20577"/>
+          <ac:chgData name="Sara Milla" userId="066c60c930f0ee7e" providerId="LiveId" clId="{F4F1AB15-4B12-4C7A-A7EC-7648ACBA0A6D}" dt="2026-01-15T14:49:14.244" v="2146" actId="5793"/>
           <ac:spMkLst>
             <pc:docMk/>
             <pc:sldMk cId="1937129893" sldId="261"/>
@@ -439,8 +440,8 @@
           </ac:spMkLst>
         </pc:spChg>
       </pc:sldChg>
-      <pc:sldChg chg="modSp new mod ord">
-        <pc:chgData name="Sara Milla" userId="066c60c930f0ee7e" providerId="LiveId" clId="{F4F1AB15-4B12-4C7A-A7EC-7648ACBA0A6D}" dt="2026-01-15T11:08:40.203" v="1846" actId="20577"/>
+      <pc:sldChg chg="modSp new mod ord modNotesTx">
+        <pc:chgData name="Sara Milla" userId="066c60c930f0ee7e" providerId="LiveId" clId="{F4F1AB15-4B12-4C7A-A7EC-7648ACBA0A6D}" dt="2026-01-15T14:43:00.306" v="1913" actId="20577"/>
         <pc:sldMkLst>
           <pc:docMk/>
           <pc:sldMk cId="4071232228" sldId="262"/>
@@ -454,7 +455,7 @@
           </ac:spMkLst>
         </pc:spChg>
         <pc:spChg chg="mod">
-          <ac:chgData name="Sara Milla" userId="066c60c930f0ee7e" providerId="LiveId" clId="{F4F1AB15-4B12-4C7A-A7EC-7648ACBA0A6D}" dt="2026-01-15T11:08:40.203" v="1846" actId="20577"/>
+          <ac:chgData name="Sara Milla" userId="066c60c930f0ee7e" providerId="LiveId" clId="{F4F1AB15-4B12-4C7A-A7EC-7648ACBA0A6D}" dt="2026-01-15T14:38:48.476" v="1880" actId="20577"/>
           <ac:spMkLst>
             <pc:docMk/>
             <pc:sldMk cId="4071232228" sldId="262"/>
@@ -462,8 +463,8 @@
           </ac:spMkLst>
         </pc:spChg>
       </pc:sldChg>
-      <pc:sldChg chg="modSp new mod">
-        <pc:chgData name="Sara Milla" userId="066c60c930f0ee7e" providerId="LiveId" clId="{F4F1AB15-4B12-4C7A-A7EC-7648ACBA0A6D}" dt="2026-01-14T13:14:30.834" v="1463" actId="20577"/>
+      <pc:sldChg chg="modSp new mod modNotesTx">
+        <pc:chgData name="Sara Milla" userId="066c60c930f0ee7e" providerId="LiveId" clId="{F4F1AB15-4B12-4C7A-A7EC-7648ACBA0A6D}" dt="2026-01-15T14:46:13.101" v="2113" actId="15"/>
         <pc:sldMkLst>
           <pc:docMk/>
           <pc:sldMk cId="2352599782" sldId="263"/>
@@ -476,9 +477,17 @@
             <ac:spMk id="2" creationId="{7C476608-C9B5-CFD2-BF95-96AAF0C0F3EF}"/>
           </ac:spMkLst>
         </pc:spChg>
+        <pc:spChg chg="mod">
+          <ac:chgData name="Sara Milla" userId="066c60c930f0ee7e" providerId="LiveId" clId="{F4F1AB15-4B12-4C7A-A7EC-7648ACBA0A6D}" dt="2026-01-15T14:46:13.101" v="2113" actId="15"/>
+          <ac:spMkLst>
+            <pc:docMk/>
+            <pc:sldMk cId="2352599782" sldId="263"/>
+            <ac:spMk id="3" creationId="{16B1C8D7-9530-43B1-AC58-405443BCD7A7}"/>
+          </ac:spMkLst>
+        </pc:spChg>
       </pc:sldChg>
-      <pc:sldChg chg="modSp new mod">
-        <pc:chgData name="Sara Milla" userId="066c60c930f0ee7e" providerId="LiveId" clId="{F4F1AB15-4B12-4C7A-A7EC-7648ACBA0A6D}" dt="2026-01-15T11:08:28.587" v="1840" actId="20577"/>
+      <pc:sldChg chg="modSp new mod ord modNotesTx">
+        <pc:chgData name="Sara Milla" userId="066c60c930f0ee7e" providerId="LiveId" clId="{F4F1AB15-4B12-4C7A-A7EC-7648ACBA0A6D}" dt="2026-01-15T14:45:09.865" v="2041" actId="20577"/>
         <pc:sldMkLst>
           <pc:docMk/>
           <pc:sldMk cId="1148987645" sldId="264"/>
@@ -492,7 +501,7 @@
           </ac:spMkLst>
         </pc:spChg>
         <pc:spChg chg="mod">
-          <ac:chgData name="Sara Milla" userId="066c60c930f0ee7e" providerId="LiveId" clId="{F4F1AB15-4B12-4C7A-A7EC-7648ACBA0A6D}" dt="2026-01-15T11:08:28.587" v="1840" actId="20577"/>
+          <ac:chgData name="Sara Milla" userId="066c60c930f0ee7e" providerId="LiveId" clId="{F4F1AB15-4B12-4C7A-A7EC-7648ACBA0A6D}" dt="2026-01-15T14:45:09.865" v="2041" actId="20577"/>
           <ac:spMkLst>
             <pc:docMk/>
             <pc:sldMk cId="1148987645" sldId="264"/>
@@ -500,8 +509,8 @@
           </ac:spMkLst>
         </pc:spChg>
       </pc:sldChg>
-      <pc:sldChg chg="addSp delSp modSp new mod">
-        <pc:chgData name="Sara Milla" userId="066c60c930f0ee7e" providerId="LiveId" clId="{F4F1AB15-4B12-4C7A-A7EC-7648ACBA0A6D}" dt="2026-01-15T11:08:16.402" v="1834" actId="20577"/>
+      <pc:sldChg chg="addSp delSp modSp new mod modNotesTx">
+        <pc:chgData name="Sara Milla" userId="066c60c930f0ee7e" providerId="LiveId" clId="{F4F1AB15-4B12-4C7A-A7EC-7648ACBA0A6D}" dt="2026-01-15T14:43:18.897" v="1937" actId="20577"/>
         <pc:sldMkLst>
           <pc:docMk/>
           <pc:sldMk cId="1168996411" sldId="265"/>
@@ -531,8 +540,8 @@
           </ac:spMkLst>
         </pc:spChg>
       </pc:sldChg>
-      <pc:sldChg chg="addSp delSp modSp new mod modClrScheme chgLayout">
-        <pc:chgData name="Sara Milla" userId="066c60c930f0ee7e" providerId="LiveId" clId="{F4F1AB15-4B12-4C7A-A7EC-7648ACBA0A6D}" dt="2026-01-15T11:09:26.106" v="1853" actId="700"/>
+      <pc:sldChg chg="addSp delSp modSp new mod modClrScheme chgLayout modNotesTx">
+        <pc:chgData name="Sara Milla" userId="066c60c930f0ee7e" providerId="LiveId" clId="{F4F1AB15-4B12-4C7A-A7EC-7648ACBA0A6D}" dt="2026-01-15T14:43:39.542" v="1951" actId="20577"/>
         <pc:sldMkLst>
           <pc:docMk/>
           <pc:sldMk cId="1838506366" sldId="266"/>
@@ -586,8 +595,8 @@
           </ac:spMkLst>
         </pc:spChg>
       </pc:sldChg>
-      <pc:sldChg chg="modSp new mod">
-        <pc:chgData name="Sara Milla" userId="066c60c930f0ee7e" providerId="LiveId" clId="{F4F1AB15-4B12-4C7A-A7EC-7648ACBA0A6D}" dt="2026-01-14T13:20:35.782" v="1736" actId="20577"/>
+      <pc:sldChg chg="modSp new mod modNotesTx">
+        <pc:chgData name="Sara Milla" userId="066c60c930f0ee7e" providerId="LiveId" clId="{F4F1AB15-4B12-4C7A-A7EC-7648ACBA0A6D}" dt="2026-01-15T14:43:32.239" v="1942" actId="20577"/>
         <pc:sldMkLst>
           <pc:docMk/>
           <pc:sldMk cId="2810788139" sldId="267"/>
@@ -607,6 +616,21 @@
           <pc:docMk/>
           <pc:sldMk cId="3111836448" sldId="267"/>
         </pc:sldMkLst>
+      </pc:sldChg>
+      <pc:sldChg chg="modSp new mod">
+        <pc:chgData name="Sara Milla" userId="066c60c930f0ee7e" providerId="LiveId" clId="{F4F1AB15-4B12-4C7A-A7EC-7648ACBA0A6D}" dt="2026-01-15T15:01:14.541" v="2185" actId="20577"/>
+        <pc:sldMkLst>
+          <pc:docMk/>
+          <pc:sldMk cId="2420114638" sldId="268"/>
+        </pc:sldMkLst>
+        <pc:spChg chg="mod">
+          <ac:chgData name="Sara Milla" userId="066c60c930f0ee7e" providerId="LiveId" clId="{F4F1AB15-4B12-4C7A-A7EC-7648ACBA0A6D}" dt="2026-01-15T15:01:14.541" v="2185" actId="20577"/>
+          <ac:spMkLst>
+            <pc:docMk/>
+            <pc:sldMk cId="2420114638" sldId="268"/>
+            <ac:spMk id="2" creationId="{C46CC512-295F-8670-8951-76CF8648EE7B}"/>
+          </ac:spMkLst>
+        </pc:spChg>
       </pc:sldChg>
     </pc:docChg>
   </pc:docChgLst>
@@ -1552,7 +1576,7 @@
   <dgm:whole/>
   <dgm:extLst>
     <a:ext uri="http://schemas.microsoft.com/office/drawing/2008/diagram">
-      <dsp:dataModelExt xmlns:dsp="http://schemas.microsoft.com/office/drawing/2008/diagram" relId="rId6" minVer="http://schemas.openxmlformats.org/drawingml/2006/diagram"/>
+      <dsp:dataModelExt xmlns:dsp="http://schemas.microsoft.com/office/drawing/2008/diagram" relId="rId7" minVer="http://schemas.openxmlformats.org/drawingml/2006/diagram"/>
     </a:ext>
   </dgm:extLst>
 </dgm:dataModel>
@@ -3465,6 +3489,267 @@
 </p:notes>
 </file>
 
+<file path=ppt/notesSlides/notesSlide10.xml><?xml version="1.0" encoding="utf-8"?>
+<p:notes xmlns:a="http://schemas.openxmlformats.org/drawingml/2006/main" xmlns:r="http://schemas.openxmlformats.org/officeDocument/2006/relationships" xmlns:p="http://schemas.openxmlformats.org/presentationml/2006/main">
+  <p:cSld>
+    <p:spTree>
+      <p:nvGrpSpPr>
+        <p:cNvPr id="1" name=""/>
+        <p:cNvGrpSpPr/>
+        <p:nvPr/>
+      </p:nvGrpSpPr>
+      <p:grpSpPr>
+        <a:xfrm>
+          <a:off x="0" y="0"/>
+          <a:ext cx="0" cy="0"/>
+          <a:chOff x="0" y="0"/>
+          <a:chExt cx="0" cy="0"/>
+        </a:xfrm>
+      </p:grpSpPr>
+      <p:sp>
+        <p:nvSpPr>
+          <p:cNvPr id="2" name="Slide Image Placeholder 1"/>
+          <p:cNvSpPr>
+            <a:spLocks noGrp="1" noRot="1" noChangeAspect="1"/>
+          </p:cNvSpPr>
+          <p:nvPr>
+            <p:ph type="sldImg"/>
+          </p:nvPr>
+        </p:nvSpPr>
+        <p:spPr/>
+      </p:sp>
+      <p:sp>
+        <p:nvSpPr>
+          <p:cNvPr id="3" name="Notes Placeholder 2"/>
+          <p:cNvSpPr>
+            <a:spLocks noGrp="1"/>
+          </p:cNvSpPr>
+          <p:nvPr>
+            <p:ph type="body" idx="1"/>
+          </p:nvPr>
+        </p:nvSpPr>
+        <p:spPr/>
+        <p:txBody>
+          <a:bodyPr/>
+          <a:lstStyle/>
+          <a:p>
+            <a:r>
+              <a:rPr lang="en-US" dirty="0"/>
+              <a:t>Valentina</a:t>
+            </a:r>
+          </a:p>
+        </p:txBody>
+      </p:sp>
+      <p:sp>
+        <p:nvSpPr>
+          <p:cNvPr id="4" name="Slide Number Placeholder 3"/>
+          <p:cNvSpPr>
+            <a:spLocks noGrp="1"/>
+          </p:cNvSpPr>
+          <p:nvPr>
+            <p:ph type="sldNum" sz="quarter" idx="5"/>
+          </p:nvPr>
+        </p:nvSpPr>
+        <p:spPr/>
+        <p:txBody>
+          <a:bodyPr/>
+          <a:lstStyle/>
+          <a:p>
+            <a:fld id="{3995E981-1EFA-47B5-8159-159ED2728D9A}" type="slidenum">
+              <a:rPr lang="en-US" smtClean="0"/>
+              <a:t>10</a:t>
+            </a:fld>
+            <a:endParaRPr lang="en-US"/>
+          </a:p>
+        </p:txBody>
+      </p:sp>
+    </p:spTree>
+    <p:extLst>
+      <p:ext uri="{BB962C8B-B14F-4D97-AF65-F5344CB8AC3E}">
+        <p14:creationId xmlns:p14="http://schemas.microsoft.com/office/powerpoint/2010/main" val="2016048580"/>
+      </p:ext>
+    </p:extLst>
+  </p:cSld>
+  <p:clrMapOvr>
+    <a:masterClrMapping/>
+  </p:clrMapOvr>
+</p:notes>
+</file>
+
+<file path=ppt/notesSlides/notesSlide11.xml><?xml version="1.0" encoding="utf-8"?>
+<p:notes xmlns:a="http://schemas.openxmlformats.org/drawingml/2006/main" xmlns:r="http://schemas.openxmlformats.org/officeDocument/2006/relationships" xmlns:p="http://schemas.openxmlformats.org/presentationml/2006/main">
+  <p:cSld>
+    <p:spTree>
+      <p:nvGrpSpPr>
+        <p:cNvPr id="1" name=""/>
+        <p:cNvGrpSpPr/>
+        <p:nvPr/>
+      </p:nvGrpSpPr>
+      <p:grpSpPr>
+        <a:xfrm>
+          <a:off x="0" y="0"/>
+          <a:ext cx="0" cy="0"/>
+          <a:chOff x="0" y="0"/>
+          <a:chExt cx="0" cy="0"/>
+        </a:xfrm>
+      </p:grpSpPr>
+      <p:sp>
+        <p:nvSpPr>
+          <p:cNvPr id="2" name="Slide Image Placeholder 1"/>
+          <p:cNvSpPr>
+            <a:spLocks noGrp="1" noRot="1" noChangeAspect="1"/>
+          </p:cNvSpPr>
+          <p:nvPr>
+            <p:ph type="sldImg"/>
+          </p:nvPr>
+        </p:nvSpPr>
+        <p:spPr/>
+      </p:sp>
+      <p:sp>
+        <p:nvSpPr>
+          <p:cNvPr id="3" name="Notes Placeholder 2"/>
+          <p:cNvSpPr>
+            <a:spLocks noGrp="1"/>
+          </p:cNvSpPr>
+          <p:nvPr>
+            <p:ph type="body" idx="1"/>
+          </p:nvPr>
+        </p:nvSpPr>
+        <p:spPr/>
+        <p:txBody>
+          <a:bodyPr/>
+          <a:lstStyle/>
+          <a:p>
+            <a:r>
+              <a:rPr lang="en-US" dirty="0"/>
+              <a:t>Julia</a:t>
+            </a:r>
+          </a:p>
+        </p:txBody>
+      </p:sp>
+      <p:sp>
+        <p:nvSpPr>
+          <p:cNvPr id="4" name="Slide Number Placeholder 3"/>
+          <p:cNvSpPr>
+            <a:spLocks noGrp="1"/>
+          </p:cNvSpPr>
+          <p:nvPr>
+            <p:ph type="sldNum" sz="quarter" idx="5"/>
+          </p:nvPr>
+        </p:nvSpPr>
+        <p:spPr/>
+        <p:txBody>
+          <a:bodyPr/>
+          <a:lstStyle/>
+          <a:p>
+            <a:fld id="{3995E981-1EFA-47B5-8159-159ED2728D9A}" type="slidenum">
+              <a:rPr lang="en-US" smtClean="0"/>
+              <a:t>11</a:t>
+            </a:fld>
+            <a:endParaRPr lang="en-US"/>
+          </a:p>
+        </p:txBody>
+      </p:sp>
+    </p:spTree>
+    <p:extLst>
+      <p:ext uri="{BB962C8B-B14F-4D97-AF65-F5344CB8AC3E}">
+        <p14:creationId xmlns:p14="http://schemas.microsoft.com/office/powerpoint/2010/main" val="1905695832"/>
+      </p:ext>
+    </p:extLst>
+  </p:cSld>
+  <p:clrMapOvr>
+    <a:masterClrMapping/>
+  </p:clrMapOvr>
+</p:notes>
+</file>
+
+<file path=ppt/notesSlides/notesSlide12.xml><?xml version="1.0" encoding="utf-8"?>
+<p:notes xmlns:a="http://schemas.openxmlformats.org/drawingml/2006/main" xmlns:r="http://schemas.openxmlformats.org/officeDocument/2006/relationships" xmlns:p="http://schemas.openxmlformats.org/presentationml/2006/main">
+  <p:cSld>
+    <p:spTree>
+      <p:nvGrpSpPr>
+        <p:cNvPr id="1" name=""/>
+        <p:cNvGrpSpPr/>
+        <p:nvPr/>
+      </p:nvGrpSpPr>
+      <p:grpSpPr>
+        <a:xfrm>
+          <a:off x="0" y="0"/>
+          <a:ext cx="0" cy="0"/>
+          <a:chOff x="0" y="0"/>
+          <a:chExt cx="0" cy="0"/>
+        </a:xfrm>
+      </p:grpSpPr>
+      <p:sp>
+        <p:nvSpPr>
+          <p:cNvPr id="2" name="Slide Image Placeholder 1"/>
+          <p:cNvSpPr>
+            <a:spLocks noGrp="1" noRot="1" noChangeAspect="1"/>
+          </p:cNvSpPr>
+          <p:nvPr>
+            <p:ph type="sldImg"/>
+          </p:nvPr>
+        </p:nvSpPr>
+        <p:spPr/>
+      </p:sp>
+      <p:sp>
+        <p:nvSpPr>
+          <p:cNvPr id="3" name="Notes Placeholder 2"/>
+          <p:cNvSpPr>
+            <a:spLocks noGrp="1"/>
+          </p:cNvSpPr>
+          <p:nvPr>
+            <p:ph type="body" idx="1"/>
+          </p:nvPr>
+        </p:nvSpPr>
+        <p:spPr/>
+        <p:txBody>
+          <a:bodyPr/>
+          <a:lstStyle/>
+          <a:p>
+            <a:r>
+              <a:rPr lang="en-US" dirty="0"/>
+              <a:t>Julia</a:t>
+            </a:r>
+          </a:p>
+        </p:txBody>
+      </p:sp>
+      <p:sp>
+        <p:nvSpPr>
+          <p:cNvPr id="4" name="Slide Number Placeholder 3"/>
+          <p:cNvSpPr>
+            <a:spLocks noGrp="1"/>
+          </p:cNvSpPr>
+          <p:nvPr>
+            <p:ph type="sldNum" sz="quarter" idx="5"/>
+          </p:nvPr>
+        </p:nvSpPr>
+        <p:spPr/>
+        <p:txBody>
+          <a:bodyPr/>
+          <a:lstStyle/>
+          <a:p>
+            <a:fld id="{3995E981-1EFA-47B5-8159-159ED2728D9A}" type="slidenum">
+              <a:rPr lang="en-US" smtClean="0"/>
+              <a:t>13</a:t>
+            </a:fld>
+            <a:endParaRPr lang="en-US"/>
+          </a:p>
+        </p:txBody>
+      </p:sp>
+    </p:spTree>
+    <p:extLst>
+      <p:ext uri="{BB962C8B-B14F-4D97-AF65-F5344CB8AC3E}">
+        <p14:creationId xmlns:p14="http://schemas.microsoft.com/office/powerpoint/2010/main" val="2380978907"/>
+      </p:ext>
+    </p:extLst>
+  </p:cSld>
+  <p:clrMapOvr>
+    <a:masterClrMapping/>
+  </p:clrMapOvr>
+</p:notes>
+</file>
+
 <file path=ppt/notesSlides/notesSlide2.xml><?xml version="1.0" encoding="utf-8"?>
 <p:notes xmlns:a="http://schemas.openxmlformats.org/drawingml/2006/main" xmlns:r="http://schemas.openxmlformats.org/officeDocument/2006/relationships" xmlns:p="http://schemas.openxmlformats.org/presentationml/2006/main">
   <p:cSld>
@@ -3509,7 +3794,10 @@
           <a:bodyPr/>
           <a:lstStyle/>
           <a:p>
-            <a:endParaRPr lang="en-US" dirty="0"/>
+            <a:r>
+              <a:rPr lang="en-US" dirty="0"/>
+              <a:t>Sara</a:t>
+            </a:r>
           </a:p>
         </p:txBody>
       </p:sp>
@@ -3530,7 +3818,7 @@
           <a:p>
             <a:fld id="{3995E981-1EFA-47B5-8159-159ED2728D9A}" type="slidenum">
               <a:rPr lang="en-US" smtClean="0"/>
-              <a:t>3</a:t>
+              <a:t>2</a:t>
             </a:fld>
             <a:endParaRPr lang="en-US"/>
           </a:p>
@@ -3539,7 +3827,7 @@
     </p:spTree>
     <p:extLst>
       <p:ext uri="{BB962C8B-B14F-4D97-AF65-F5344CB8AC3E}">
-        <p14:creationId xmlns:p14="http://schemas.microsoft.com/office/powerpoint/2010/main" val="3960785665"/>
+        <p14:creationId xmlns:p14="http://schemas.microsoft.com/office/powerpoint/2010/main" val="2112434888"/>
       </p:ext>
     </p:extLst>
   </p:cSld>
@@ -3595,41 +3883,7 @@
           <a:p>
             <a:r>
               <a:rPr lang="en-US" dirty="0"/>
-              <a:t>-BERT models typically have a 512-token limit</a:t>
-            </a:r>
-          </a:p>
-          <a:p>
-            <a:r>
-              <a:rPr lang="en-US" dirty="0"/>
-              <a:t>-implemented a </a:t>
-            </a:r>
-            <a:r>
-              <a:rPr lang="en-US" b="0" dirty="0"/>
-              <a:t>chunking </a:t>
-            </a:r>
-            <a:r>
-              <a:rPr lang="en-US" dirty="0"/>
-              <a:t>process</a:t>
-            </a:r>
-          </a:p>
-          <a:p>
-            <a:r>
-              <a:rPr lang="en-US" dirty="0"/>
-              <a:t>-splits the text into 2000 char blocks with a 100 character overlap</a:t>
-            </a:r>
-          </a:p>
-          <a:p>
-            <a:r>
-              <a:rPr lang="en-US" dirty="0"/>
-              <a:t>-The pipeline predicts entities within each chunk, and the code filters these results to retain only those categorized </a:t>
-            </a:r>
-            <a:r>
-              <a:rPr lang="en-US"/>
-              <a:t>as persons </a:t>
-            </a:r>
-            <a:r>
-              <a:rPr lang="en-US" dirty="0"/>
-              <a:t>or organizations.</a:t>
+              <a:t>Sara</a:t>
             </a:r>
           </a:p>
         </p:txBody>
@@ -3651,7 +3905,7 @@
           <a:p>
             <a:fld id="{3995E981-1EFA-47B5-8159-159ED2728D9A}" type="slidenum">
               <a:rPr lang="en-US" smtClean="0"/>
-              <a:t>4</a:t>
+              <a:t>3</a:t>
             </a:fld>
             <a:endParaRPr lang="en-US"/>
           </a:p>
@@ -3660,7 +3914,7 @@
     </p:spTree>
     <p:extLst>
       <p:ext uri="{BB962C8B-B14F-4D97-AF65-F5344CB8AC3E}">
-        <p14:creationId xmlns:p14="http://schemas.microsoft.com/office/powerpoint/2010/main" val="1623089303"/>
+        <p14:creationId xmlns:p14="http://schemas.microsoft.com/office/powerpoint/2010/main" val="3960785665"/>
       </p:ext>
     </p:extLst>
   </p:cSld>
@@ -3714,7 +3968,43 @@
           <a:bodyPr/>
           <a:lstStyle/>
           <a:p>
-            <a:endParaRPr lang="en-US" dirty="0"/>
+            <a:r>
+              <a:rPr lang="en-US" dirty="0"/>
+              <a:t>Sara</a:t>
+            </a:r>
+            <a:br>
+              <a:rPr lang="en-US" dirty="0"/>
+            </a:br>
+            <a:r>
+              <a:rPr lang="en-US" dirty="0"/>
+              <a:t>-BERT models typically have a 512-token limit</a:t>
+            </a:r>
+          </a:p>
+          <a:p>
+            <a:r>
+              <a:rPr lang="en-US" dirty="0"/>
+              <a:t>-implemented a </a:t>
+            </a:r>
+            <a:r>
+              <a:rPr lang="en-US" b="0" dirty="0"/>
+              <a:t>chunking </a:t>
+            </a:r>
+            <a:r>
+              <a:rPr lang="en-US" dirty="0"/>
+              <a:t>process</a:t>
+            </a:r>
+          </a:p>
+          <a:p>
+            <a:r>
+              <a:rPr lang="en-US" dirty="0"/>
+              <a:t>-splits the text into 2000 char blocks with a 100 character overlap</a:t>
+            </a:r>
+          </a:p>
+          <a:p>
+            <a:r>
+              <a:rPr lang="en-US" dirty="0"/>
+              <a:t>-The pipeline predicts entities within each chunk, and the code filters these results to retain only those categorized as persons or organizations.</a:t>
+            </a:r>
           </a:p>
         </p:txBody>
       </p:sp>
@@ -3735,7 +4025,7 @@
           <a:p>
             <a:fld id="{3995E981-1EFA-47B5-8159-159ED2728D9A}" type="slidenum">
               <a:rPr lang="en-US" smtClean="0"/>
-              <a:t>11</a:t>
+              <a:t>4</a:t>
             </a:fld>
             <a:endParaRPr lang="en-US"/>
           </a:p>
@@ -3744,7 +4034,7 @@
     </p:spTree>
     <p:extLst>
       <p:ext uri="{BB962C8B-B14F-4D97-AF65-F5344CB8AC3E}">
-        <p14:creationId xmlns:p14="http://schemas.microsoft.com/office/powerpoint/2010/main" val="2016048580"/>
+        <p14:creationId xmlns:p14="http://schemas.microsoft.com/office/powerpoint/2010/main" val="1623089303"/>
       </p:ext>
     </p:extLst>
   </p:cSld>
@@ -3798,7 +4088,10 @@
           <a:bodyPr/>
           <a:lstStyle/>
           <a:p>
-            <a:endParaRPr lang="en-US" dirty="0"/>
+            <a:r>
+              <a:rPr lang="en-US" dirty="0"/>
+              <a:t>Valentina</a:t>
+            </a:r>
           </a:p>
         </p:txBody>
       </p:sp>
@@ -3819,7 +4112,7 @@
           <a:p>
             <a:fld id="{3995E981-1EFA-47B5-8159-159ED2728D9A}" type="slidenum">
               <a:rPr lang="en-US" smtClean="0"/>
-              <a:t>12</a:t>
+              <a:t>5</a:t>
             </a:fld>
             <a:endParaRPr lang="en-US"/>
           </a:p>
@@ -3828,7 +4121,355 @@
     </p:spTree>
     <p:extLst>
       <p:ext uri="{BB962C8B-B14F-4D97-AF65-F5344CB8AC3E}">
-        <p14:creationId xmlns:p14="http://schemas.microsoft.com/office/powerpoint/2010/main" val="1905695832"/>
+        <p14:creationId xmlns:p14="http://schemas.microsoft.com/office/powerpoint/2010/main" val="3253918219"/>
+      </p:ext>
+    </p:extLst>
+  </p:cSld>
+  <p:clrMapOvr>
+    <a:masterClrMapping/>
+  </p:clrMapOvr>
+</p:notes>
+</file>
+
+<file path=ppt/notesSlides/notesSlide6.xml><?xml version="1.0" encoding="utf-8"?>
+<p:notes xmlns:a="http://schemas.openxmlformats.org/drawingml/2006/main" xmlns:r="http://schemas.openxmlformats.org/officeDocument/2006/relationships" xmlns:p="http://schemas.openxmlformats.org/presentationml/2006/main">
+  <p:cSld>
+    <p:spTree>
+      <p:nvGrpSpPr>
+        <p:cNvPr id="1" name=""/>
+        <p:cNvGrpSpPr/>
+        <p:nvPr/>
+      </p:nvGrpSpPr>
+      <p:grpSpPr>
+        <a:xfrm>
+          <a:off x="0" y="0"/>
+          <a:ext cx="0" cy="0"/>
+          <a:chOff x="0" y="0"/>
+          <a:chExt cx="0" cy="0"/>
+        </a:xfrm>
+      </p:grpSpPr>
+      <p:sp>
+        <p:nvSpPr>
+          <p:cNvPr id="2" name="Slide Image Placeholder 1"/>
+          <p:cNvSpPr>
+            <a:spLocks noGrp="1" noRot="1" noChangeAspect="1"/>
+          </p:cNvSpPr>
+          <p:nvPr>
+            <p:ph type="sldImg"/>
+          </p:nvPr>
+        </p:nvSpPr>
+        <p:spPr/>
+      </p:sp>
+      <p:sp>
+        <p:nvSpPr>
+          <p:cNvPr id="3" name="Notes Placeholder 2"/>
+          <p:cNvSpPr>
+            <a:spLocks noGrp="1"/>
+          </p:cNvSpPr>
+          <p:nvPr>
+            <p:ph type="body" idx="1"/>
+          </p:nvPr>
+        </p:nvSpPr>
+        <p:spPr/>
+        <p:txBody>
+          <a:bodyPr/>
+          <a:lstStyle/>
+          <a:p>
+            <a:r>
+              <a:rPr lang="en-US" dirty="0"/>
+              <a:t>Kilian</a:t>
+            </a:r>
+          </a:p>
+        </p:txBody>
+      </p:sp>
+      <p:sp>
+        <p:nvSpPr>
+          <p:cNvPr id="4" name="Slide Number Placeholder 3"/>
+          <p:cNvSpPr>
+            <a:spLocks noGrp="1"/>
+          </p:cNvSpPr>
+          <p:nvPr>
+            <p:ph type="sldNum" sz="quarter" idx="5"/>
+          </p:nvPr>
+        </p:nvSpPr>
+        <p:spPr/>
+        <p:txBody>
+          <a:bodyPr/>
+          <a:lstStyle/>
+          <a:p>
+            <a:fld id="{3995E981-1EFA-47B5-8159-159ED2728D9A}" type="slidenum">
+              <a:rPr lang="en-US" smtClean="0"/>
+              <a:t>6</a:t>
+            </a:fld>
+            <a:endParaRPr lang="en-US"/>
+          </a:p>
+        </p:txBody>
+      </p:sp>
+    </p:spTree>
+    <p:extLst>
+      <p:ext uri="{BB962C8B-B14F-4D97-AF65-F5344CB8AC3E}">
+        <p14:creationId xmlns:p14="http://schemas.microsoft.com/office/powerpoint/2010/main" val="1378081923"/>
+      </p:ext>
+    </p:extLst>
+  </p:cSld>
+  <p:clrMapOvr>
+    <a:masterClrMapping/>
+  </p:clrMapOvr>
+</p:notes>
+</file>
+
+<file path=ppt/notesSlides/notesSlide7.xml><?xml version="1.0" encoding="utf-8"?>
+<p:notes xmlns:a="http://schemas.openxmlformats.org/drawingml/2006/main" xmlns:r="http://schemas.openxmlformats.org/officeDocument/2006/relationships" xmlns:p="http://schemas.openxmlformats.org/presentationml/2006/main">
+  <p:cSld>
+    <p:spTree>
+      <p:nvGrpSpPr>
+        <p:cNvPr id="1" name=""/>
+        <p:cNvGrpSpPr/>
+        <p:nvPr/>
+      </p:nvGrpSpPr>
+      <p:grpSpPr>
+        <a:xfrm>
+          <a:off x="0" y="0"/>
+          <a:ext cx="0" cy="0"/>
+          <a:chOff x="0" y="0"/>
+          <a:chExt cx="0" cy="0"/>
+        </a:xfrm>
+      </p:grpSpPr>
+      <p:sp>
+        <p:nvSpPr>
+          <p:cNvPr id="2" name="Slide Image Placeholder 1"/>
+          <p:cNvSpPr>
+            <a:spLocks noGrp="1" noRot="1" noChangeAspect="1"/>
+          </p:cNvSpPr>
+          <p:nvPr>
+            <p:ph type="sldImg"/>
+          </p:nvPr>
+        </p:nvSpPr>
+        <p:spPr/>
+      </p:sp>
+      <p:sp>
+        <p:nvSpPr>
+          <p:cNvPr id="3" name="Notes Placeholder 2"/>
+          <p:cNvSpPr>
+            <a:spLocks noGrp="1"/>
+          </p:cNvSpPr>
+          <p:nvPr>
+            <p:ph type="body" idx="1"/>
+          </p:nvPr>
+        </p:nvSpPr>
+        <p:spPr/>
+        <p:txBody>
+          <a:bodyPr/>
+          <a:lstStyle/>
+          <a:p>
+            <a:r>
+              <a:rPr lang="en-US" dirty="0"/>
+              <a:t>Julia</a:t>
+            </a:r>
+          </a:p>
+        </p:txBody>
+      </p:sp>
+      <p:sp>
+        <p:nvSpPr>
+          <p:cNvPr id="4" name="Slide Number Placeholder 3"/>
+          <p:cNvSpPr>
+            <a:spLocks noGrp="1"/>
+          </p:cNvSpPr>
+          <p:nvPr>
+            <p:ph type="sldNum" sz="quarter" idx="5"/>
+          </p:nvPr>
+        </p:nvSpPr>
+        <p:spPr/>
+        <p:txBody>
+          <a:bodyPr/>
+          <a:lstStyle/>
+          <a:p>
+            <a:fld id="{3995E981-1EFA-47B5-8159-159ED2728D9A}" type="slidenum">
+              <a:rPr lang="en-US" smtClean="0"/>
+              <a:t>7</a:t>
+            </a:fld>
+            <a:endParaRPr lang="en-US"/>
+          </a:p>
+        </p:txBody>
+      </p:sp>
+    </p:spTree>
+    <p:extLst>
+      <p:ext uri="{BB962C8B-B14F-4D97-AF65-F5344CB8AC3E}">
+        <p14:creationId xmlns:p14="http://schemas.microsoft.com/office/powerpoint/2010/main" val="395707431"/>
+      </p:ext>
+    </p:extLst>
+  </p:cSld>
+  <p:clrMapOvr>
+    <a:masterClrMapping/>
+  </p:clrMapOvr>
+</p:notes>
+</file>
+
+<file path=ppt/notesSlides/notesSlide8.xml><?xml version="1.0" encoding="utf-8"?>
+<p:notes xmlns:a="http://schemas.openxmlformats.org/drawingml/2006/main" xmlns:r="http://schemas.openxmlformats.org/officeDocument/2006/relationships" xmlns:p="http://schemas.openxmlformats.org/presentationml/2006/main">
+  <p:cSld>
+    <p:spTree>
+      <p:nvGrpSpPr>
+        <p:cNvPr id="1" name=""/>
+        <p:cNvGrpSpPr/>
+        <p:nvPr/>
+      </p:nvGrpSpPr>
+      <p:grpSpPr>
+        <a:xfrm>
+          <a:off x="0" y="0"/>
+          <a:ext cx="0" cy="0"/>
+          <a:chOff x="0" y="0"/>
+          <a:chExt cx="0" cy="0"/>
+        </a:xfrm>
+      </p:grpSpPr>
+      <p:sp>
+        <p:nvSpPr>
+          <p:cNvPr id="2" name="Slide Image Placeholder 1"/>
+          <p:cNvSpPr>
+            <a:spLocks noGrp="1" noRot="1" noChangeAspect="1"/>
+          </p:cNvSpPr>
+          <p:nvPr>
+            <p:ph type="sldImg"/>
+          </p:nvPr>
+        </p:nvSpPr>
+        <p:spPr/>
+      </p:sp>
+      <p:sp>
+        <p:nvSpPr>
+          <p:cNvPr id="3" name="Notes Placeholder 2"/>
+          <p:cNvSpPr>
+            <a:spLocks noGrp="1"/>
+          </p:cNvSpPr>
+          <p:nvPr>
+            <p:ph type="body" idx="1"/>
+          </p:nvPr>
+        </p:nvSpPr>
+        <p:spPr/>
+        <p:txBody>
+          <a:bodyPr/>
+          <a:lstStyle/>
+          <a:p>
+            <a:r>
+              <a:rPr lang="en-US" dirty="0"/>
+              <a:t>Julia, Valentina</a:t>
+            </a:r>
+          </a:p>
+        </p:txBody>
+      </p:sp>
+      <p:sp>
+        <p:nvSpPr>
+          <p:cNvPr id="4" name="Slide Number Placeholder 3"/>
+          <p:cNvSpPr>
+            <a:spLocks noGrp="1"/>
+          </p:cNvSpPr>
+          <p:nvPr>
+            <p:ph type="sldNum" sz="quarter" idx="5"/>
+          </p:nvPr>
+        </p:nvSpPr>
+        <p:spPr/>
+        <p:txBody>
+          <a:bodyPr/>
+          <a:lstStyle/>
+          <a:p>
+            <a:fld id="{3995E981-1EFA-47B5-8159-159ED2728D9A}" type="slidenum">
+              <a:rPr lang="en-US" smtClean="0"/>
+              <a:t>8</a:t>
+            </a:fld>
+            <a:endParaRPr lang="en-US"/>
+          </a:p>
+        </p:txBody>
+      </p:sp>
+    </p:spTree>
+    <p:extLst>
+      <p:ext uri="{BB962C8B-B14F-4D97-AF65-F5344CB8AC3E}">
+        <p14:creationId xmlns:p14="http://schemas.microsoft.com/office/powerpoint/2010/main" val="52000600"/>
+      </p:ext>
+    </p:extLst>
+  </p:cSld>
+  <p:clrMapOvr>
+    <a:masterClrMapping/>
+  </p:clrMapOvr>
+</p:notes>
+</file>
+
+<file path=ppt/notesSlides/notesSlide9.xml><?xml version="1.0" encoding="utf-8"?>
+<p:notes xmlns:a="http://schemas.openxmlformats.org/drawingml/2006/main" xmlns:r="http://schemas.openxmlformats.org/officeDocument/2006/relationships" xmlns:p="http://schemas.openxmlformats.org/presentationml/2006/main">
+  <p:cSld>
+    <p:spTree>
+      <p:nvGrpSpPr>
+        <p:cNvPr id="1" name=""/>
+        <p:cNvGrpSpPr/>
+        <p:nvPr/>
+      </p:nvGrpSpPr>
+      <p:grpSpPr>
+        <a:xfrm>
+          <a:off x="0" y="0"/>
+          <a:ext cx="0" cy="0"/>
+          <a:chOff x="0" y="0"/>
+          <a:chExt cx="0" cy="0"/>
+        </a:xfrm>
+      </p:grpSpPr>
+      <p:sp>
+        <p:nvSpPr>
+          <p:cNvPr id="2" name="Slide Image Placeholder 1"/>
+          <p:cNvSpPr>
+            <a:spLocks noGrp="1" noRot="1" noChangeAspect="1"/>
+          </p:cNvSpPr>
+          <p:nvPr>
+            <p:ph type="sldImg"/>
+          </p:nvPr>
+        </p:nvSpPr>
+        <p:spPr/>
+      </p:sp>
+      <p:sp>
+        <p:nvSpPr>
+          <p:cNvPr id="3" name="Notes Placeholder 2"/>
+          <p:cNvSpPr>
+            <a:spLocks noGrp="1"/>
+          </p:cNvSpPr>
+          <p:nvPr>
+            <p:ph type="body" idx="1"/>
+          </p:nvPr>
+        </p:nvSpPr>
+        <p:spPr/>
+        <p:txBody>
+          <a:bodyPr/>
+          <a:lstStyle/>
+          <a:p>
+            <a:r>
+              <a:rPr lang="en-US" dirty="0"/>
+              <a:t>Kilian</a:t>
+            </a:r>
+          </a:p>
+        </p:txBody>
+      </p:sp>
+      <p:sp>
+        <p:nvSpPr>
+          <p:cNvPr id="4" name="Slide Number Placeholder 3"/>
+          <p:cNvSpPr>
+            <a:spLocks noGrp="1"/>
+          </p:cNvSpPr>
+          <p:nvPr>
+            <p:ph type="sldNum" sz="quarter" idx="5"/>
+          </p:nvPr>
+        </p:nvSpPr>
+        <p:spPr/>
+        <p:txBody>
+          <a:bodyPr/>
+          <a:lstStyle/>
+          <a:p>
+            <a:fld id="{3995E981-1EFA-47B5-8159-159ED2728D9A}" type="slidenum">
+              <a:rPr lang="en-US" smtClean="0"/>
+              <a:t>9</a:t>
+            </a:fld>
+            <a:endParaRPr lang="en-US"/>
+          </a:p>
+        </p:txBody>
+      </p:sp>
+    </p:spTree>
+    <p:extLst>
+      <p:ext uri="{BB962C8B-B14F-4D97-AF65-F5344CB8AC3E}">
+        <p14:creationId xmlns:p14="http://schemas.microsoft.com/office/powerpoint/2010/main" val="1351378729"/>
       </p:ext>
     </p:extLst>
   </p:cSld>
@@ -7718,10 +8359,10 @@
       </p:grpSpPr>
       <p:sp>
         <p:nvSpPr>
-          <p:cNvPr id="2" name="Title 1">
+          <p:cNvPr id="4" name="Title 3">
             <a:extLst>
               <a:ext uri="{FF2B5EF4-FFF2-40B4-BE49-F238E27FC236}">
-                <a16:creationId xmlns:a16="http://schemas.microsoft.com/office/drawing/2014/main" id="{944200E1-2635-870F-F443-3C547017B867}"/>
+                <a16:creationId xmlns:a16="http://schemas.microsoft.com/office/drawing/2014/main" id="{B7ABD7DE-0ECE-BC87-DCD0-C57565CE6078}"/>
               </a:ext>
             </a:extLst>
           </p:cNvPr>
@@ -7739,17 +8380,17 @@
           <a:p>
             <a:r>
               <a:rPr lang="en-US" dirty="0"/>
-              <a:t>Evaluation</a:t>
-            </a:r>
-          </a:p>
-        </p:txBody>
-      </p:sp>
-      <p:sp>
-        <p:nvSpPr>
-          <p:cNvPr id="3" name="Content Placeholder 2">
+              <a:t>Results</a:t>
+            </a:r>
+          </a:p>
+        </p:txBody>
+      </p:sp>
+      <p:sp>
+        <p:nvSpPr>
+          <p:cNvPr id="2" name="Content Placeholder 1">
             <a:extLst>
               <a:ext uri="{FF2B5EF4-FFF2-40B4-BE49-F238E27FC236}">
-                <a16:creationId xmlns:a16="http://schemas.microsoft.com/office/drawing/2014/main" id="{4CF95A48-446E-D7E7-5082-A11CB39BF556}"/>
+                <a16:creationId xmlns:a16="http://schemas.microsoft.com/office/drawing/2014/main" id="{06D479E7-D24D-BB51-903A-AAE37A8501E7}"/>
               </a:ext>
             </a:extLst>
           </p:cNvPr>
@@ -7765,35 +8406,14 @@
           <a:bodyPr/>
           <a:lstStyle/>
           <a:p>
-            <a:r>
-              <a:rPr lang="en-US" dirty="0"/>
-              <a:t>Precision, Recall, Macro-F1 Score – calculated per label</a:t>
-            </a:r>
-          </a:p>
-          <a:p>
-            <a:r>
-              <a:rPr lang="en-US" dirty="0"/>
-              <a:t>Exact span matching: an entity is TP if start, end, and label match the ground truth perfectly</a:t>
-            </a:r>
-          </a:p>
-          <a:p>
-            <a:r>
-              <a:rPr lang="en-US" dirty="0"/>
-              <a:t>A custom script (evaluate_results.py) compares the JSON output of each model against the parsed XMI gold standard file</a:t>
-            </a:r>
-          </a:p>
-          <a:p>
-            <a:r>
-              <a:rPr lang="en-US" dirty="0"/>
-              <a:t>Penalizes even partial matches, ensuring our models are precise on exact entity boundaries</a:t>
-            </a:r>
+            <a:endParaRPr lang="en-US"/>
           </a:p>
         </p:txBody>
       </p:sp>
     </p:spTree>
     <p:extLst>
       <p:ext uri="{BB962C8B-B14F-4D97-AF65-F5344CB8AC3E}">
-        <p14:creationId xmlns:p14="http://schemas.microsoft.com/office/powerpoint/2010/main" val="1168996411"/>
+        <p14:creationId xmlns:p14="http://schemas.microsoft.com/office/powerpoint/2010/main" val="1838506366"/>
       </p:ext>
     </p:extLst>
   </p:cSld>
@@ -7822,10 +8442,10 @@
       </p:grpSpPr>
       <p:sp>
         <p:nvSpPr>
-          <p:cNvPr id="4" name="Title 3">
+          <p:cNvPr id="2" name="Title 1">
             <a:extLst>
               <a:ext uri="{FF2B5EF4-FFF2-40B4-BE49-F238E27FC236}">
-                <a16:creationId xmlns:a16="http://schemas.microsoft.com/office/drawing/2014/main" id="{B7ABD7DE-0ECE-BC87-DCD0-C57565CE6078}"/>
+                <a16:creationId xmlns:a16="http://schemas.microsoft.com/office/drawing/2014/main" id="{37F04D9E-4AEB-AF0C-B22D-4D6766388436}"/>
               </a:ext>
             </a:extLst>
           </p:cNvPr>
@@ -7843,17 +8463,17 @@
           <a:p>
             <a:r>
               <a:rPr lang="en-US" dirty="0"/>
-              <a:t>Results</a:t>
-            </a:r>
-          </a:p>
-        </p:txBody>
-      </p:sp>
-      <p:sp>
-        <p:nvSpPr>
-          <p:cNvPr id="2" name="Content Placeholder 1">
+              <a:t>Conclusion &amp; Future Work</a:t>
+            </a:r>
+          </a:p>
+        </p:txBody>
+      </p:sp>
+      <p:sp>
+        <p:nvSpPr>
+          <p:cNvPr id="3" name="Content Placeholder 2">
             <a:extLst>
               <a:ext uri="{FF2B5EF4-FFF2-40B4-BE49-F238E27FC236}">
-                <a16:creationId xmlns:a16="http://schemas.microsoft.com/office/drawing/2014/main" id="{06D479E7-D24D-BB51-903A-AAE37A8501E7}"/>
+                <a16:creationId xmlns:a16="http://schemas.microsoft.com/office/drawing/2014/main" id="{E0F8DECE-B769-7A64-D5C0-47E404687D34}"/>
               </a:ext>
             </a:extLst>
           </p:cNvPr>
@@ -7861,7 +8481,32 @@
             <a:spLocks noGrp="1"/>
           </p:cNvSpPr>
           <p:nvPr>
-            <p:ph idx="1"/>
+            <p:ph sz="half" idx="1"/>
+          </p:nvPr>
+        </p:nvSpPr>
+        <p:spPr/>
+        <p:txBody>
+          <a:bodyPr/>
+          <a:lstStyle/>
+          <a:p>
+            <a:endParaRPr lang="en-US"/>
+          </a:p>
+        </p:txBody>
+      </p:sp>
+      <p:sp>
+        <p:nvSpPr>
+          <p:cNvPr id="4" name="Content Placeholder 3">
+            <a:extLst>
+              <a:ext uri="{FF2B5EF4-FFF2-40B4-BE49-F238E27FC236}">
+                <a16:creationId xmlns:a16="http://schemas.microsoft.com/office/drawing/2014/main" id="{E9369F53-CE4C-58AA-1017-11443D297D7B}"/>
+              </a:ext>
+            </a:extLst>
+          </p:cNvPr>
+          <p:cNvSpPr>
+            <a:spLocks noGrp="1"/>
+          </p:cNvSpPr>
+          <p:nvPr>
+            <p:ph sz="half" idx="2"/>
           </p:nvPr>
         </p:nvSpPr>
         <p:spPr/>
@@ -7876,7 +8521,7 @@
     </p:spTree>
     <p:extLst>
       <p:ext uri="{BB962C8B-B14F-4D97-AF65-F5344CB8AC3E}">
-        <p14:creationId xmlns:p14="http://schemas.microsoft.com/office/powerpoint/2010/main" val="1838506366"/>
+        <p14:creationId xmlns:p14="http://schemas.microsoft.com/office/powerpoint/2010/main" val="2810788139"/>
       </p:ext>
     </p:extLst>
   </p:cSld>
@@ -7908,7 +8553,7 @@
           <p:cNvPr id="2" name="Title 1">
             <a:extLst>
               <a:ext uri="{FF2B5EF4-FFF2-40B4-BE49-F238E27FC236}">
-                <a16:creationId xmlns:a16="http://schemas.microsoft.com/office/drawing/2014/main" id="{37F04D9E-4AEB-AF0C-B22D-4D6766388436}"/>
+                <a16:creationId xmlns:a16="http://schemas.microsoft.com/office/drawing/2014/main" id="{C46CC512-295F-8670-8951-76CF8648EE7B}"/>
               </a:ext>
             </a:extLst>
           </p:cNvPr>
@@ -7925,9 +8570,10 @@
           <a:lstStyle/>
           <a:p>
             <a:r>
-              <a:rPr lang="en-US" dirty="0"/>
-              <a:t>Conclusion &amp; Future Work</a:t>
-            </a:r>
+              <a:rPr lang="en-US"/>
+              <a:t>Questions?</a:t>
+            </a:r>
+            <a:endParaRPr lang="en-US" dirty="0"/>
           </a:p>
         </p:txBody>
       </p:sp>
@@ -7936,7 +8582,7 @@
           <p:cNvPr id="3" name="Content Placeholder 2">
             <a:extLst>
               <a:ext uri="{FF2B5EF4-FFF2-40B4-BE49-F238E27FC236}">
-                <a16:creationId xmlns:a16="http://schemas.microsoft.com/office/drawing/2014/main" id="{E0F8DECE-B769-7A64-D5C0-47E404687D34}"/>
+                <a16:creationId xmlns:a16="http://schemas.microsoft.com/office/drawing/2014/main" id="{4C5464DE-27D5-CC00-2B5C-6886DDA9C4D4}"/>
               </a:ext>
             </a:extLst>
           </p:cNvPr>
@@ -7961,7 +8607,7 @@
           <p:cNvPr id="4" name="Content Placeholder 3">
             <a:extLst>
               <a:ext uri="{FF2B5EF4-FFF2-40B4-BE49-F238E27FC236}">
-                <a16:creationId xmlns:a16="http://schemas.microsoft.com/office/drawing/2014/main" id="{E9369F53-CE4C-58AA-1017-11443D297D7B}"/>
+                <a16:creationId xmlns:a16="http://schemas.microsoft.com/office/drawing/2014/main" id="{B638BCC2-1490-497A-86DF-2B290D58800E}"/>
               </a:ext>
             </a:extLst>
           </p:cNvPr>
@@ -7984,7 +8630,138 @@
     </p:spTree>
     <p:extLst>
       <p:ext uri="{BB962C8B-B14F-4D97-AF65-F5344CB8AC3E}">
-        <p14:creationId xmlns:p14="http://schemas.microsoft.com/office/powerpoint/2010/main" val="2810788139"/>
+        <p14:creationId xmlns:p14="http://schemas.microsoft.com/office/powerpoint/2010/main" val="2420114638"/>
+      </p:ext>
+    </p:extLst>
+  </p:cSld>
+  <p:clrMapOvr>
+    <a:masterClrMapping/>
+  </p:clrMapOvr>
+</p:sld>
+</file>
+
+<file path=ppt/slides/slide13.xml><?xml version="1.0" encoding="utf-8"?>
+<p:sld xmlns:a="http://schemas.openxmlformats.org/drawingml/2006/main" xmlns:r="http://schemas.openxmlformats.org/officeDocument/2006/relationships" xmlns:p="http://schemas.openxmlformats.org/presentationml/2006/main">
+  <p:cSld>
+    <p:spTree>
+      <p:nvGrpSpPr>
+        <p:cNvPr id="1" name=""/>
+        <p:cNvGrpSpPr/>
+        <p:nvPr/>
+      </p:nvGrpSpPr>
+      <p:grpSpPr>
+        <a:xfrm>
+          <a:off x="0" y="0"/>
+          <a:ext cx="0" cy="0"/>
+          <a:chOff x="0" y="0"/>
+          <a:chExt cx="0" cy="0"/>
+        </a:xfrm>
+      </p:grpSpPr>
+      <p:sp>
+        <p:nvSpPr>
+          <p:cNvPr id="2" name="Title 1">
+            <a:extLst>
+              <a:ext uri="{FF2B5EF4-FFF2-40B4-BE49-F238E27FC236}">
+                <a16:creationId xmlns:a16="http://schemas.microsoft.com/office/drawing/2014/main" id="{C3254D78-9B28-FD7C-4604-EC32EB30F658}"/>
+              </a:ext>
+            </a:extLst>
+          </p:cNvPr>
+          <p:cNvSpPr>
+            <a:spLocks noGrp="1"/>
+          </p:cNvSpPr>
+          <p:nvPr>
+            <p:ph type="title"/>
+          </p:nvPr>
+        </p:nvSpPr>
+        <p:spPr/>
+        <p:txBody>
+          <a:bodyPr/>
+          <a:lstStyle/>
+          <a:p>
+            <a:r>
+              <a:rPr lang="en-US" dirty="0" err="1"/>
+              <a:t>SpaCy</a:t>
+            </a:r>
+            <a:r>
+              <a:rPr lang="en-US" dirty="0"/>
+              <a:t> + Rules</a:t>
+            </a:r>
+          </a:p>
+        </p:txBody>
+      </p:sp>
+      <p:sp>
+        <p:nvSpPr>
+          <p:cNvPr id="3" name="Content Placeholder 2">
+            <a:extLst>
+              <a:ext uri="{FF2B5EF4-FFF2-40B4-BE49-F238E27FC236}">
+                <a16:creationId xmlns:a16="http://schemas.microsoft.com/office/drawing/2014/main" id="{D17C41B8-5975-6BB8-1755-D6D2D00064AA}"/>
+              </a:ext>
+            </a:extLst>
+          </p:cNvPr>
+          <p:cNvSpPr>
+            <a:spLocks noGrp="1"/>
+          </p:cNvSpPr>
+          <p:nvPr>
+            <p:ph idx="1"/>
+          </p:nvPr>
+        </p:nvSpPr>
+        <p:spPr/>
+        <p:txBody>
+          <a:bodyPr/>
+          <a:lstStyle/>
+          <a:p>
+            <a:r>
+              <a:rPr lang="en-US" dirty="0"/>
+              <a:t>Hybrid approach combines our custom </a:t>
+            </a:r>
+            <a:r>
+              <a:rPr lang="en-US" dirty="0" err="1"/>
+              <a:t>EntityRuler</a:t>
+            </a:r>
+            <a:r>
+              <a:rPr lang="en-US" dirty="0"/>
+              <a:t> component before the statistical NER component in the pipeline</a:t>
+            </a:r>
+          </a:p>
+          <a:p>
+            <a:r>
+              <a:rPr lang="en-US" dirty="0"/>
+              <a:t>Hard-coded patterns for known failures (e.g., "</a:t>
+            </a:r>
+            <a:r>
+              <a:rPr lang="en-US" dirty="0" err="1"/>
+              <a:t>Bundesministerium</a:t>
+            </a:r>
+            <a:r>
+              <a:rPr lang="en-US" dirty="0"/>
+              <a:t> für X") force the model to respect our domain knowledge first</a:t>
+            </a:r>
+          </a:p>
+          <a:p>
+            <a:pPr lvl="1"/>
+            <a:r>
+              <a:rPr lang="en-US" dirty="0"/>
+              <a:t>From manual annotations</a:t>
+            </a:r>
+          </a:p>
+          <a:p>
+            <a:r>
+              <a:rPr lang="en-US" dirty="0"/>
+              <a:t>The model then only predicts on the remaining text, effectively filling in the gaps left by the rules</a:t>
+            </a:r>
+          </a:p>
+          <a:p>
+            <a:r>
+              <a:rPr lang="en-US" dirty="0"/>
+              <a:t>Aims to fix domain errors while keeping the generalization power with the ML model</a:t>
+            </a:r>
+          </a:p>
+        </p:txBody>
+      </p:sp>
+    </p:spTree>
+    <p:extLst>
+      <p:ext uri="{BB962C8B-B14F-4D97-AF65-F5344CB8AC3E}">
+        <p14:creationId xmlns:p14="http://schemas.microsoft.com/office/powerpoint/2010/main" val="1148987645"/>
       </p:ext>
     </p:extLst>
   </p:cSld>
@@ -8158,7 +8935,7 @@
         </p:xfrm>
         <a:graphic>
           <a:graphicData uri="http://schemas.openxmlformats.org/drawingml/2006/diagram">
-            <dgm:relIds xmlns:dgm="http://schemas.openxmlformats.org/drawingml/2006/diagram" xmlns:r="http://schemas.openxmlformats.org/officeDocument/2006/relationships" r:dm="rId2" r:lo="rId3" r:qs="rId4" r:cs="rId5"/>
+            <dgm:relIds xmlns:dgm="http://schemas.openxmlformats.org/drawingml/2006/diagram" xmlns:r="http://schemas.openxmlformats.org/officeDocument/2006/relationships" r:dm="rId3" r:lo="rId4" r:qs="rId5" r:cs="rId6"/>
           </a:graphicData>
         </a:graphic>
       </p:graphicFrame>
@@ -8494,7 +9271,15 @@
           <a:p>
             <a:r>
               <a:rPr lang="en-US" dirty="0"/>
-              <a:t>Sub-word tokenization handled via Hugging Face Pipeline</a:t>
+              <a:t>Sub-word tokenization handled via </a:t>
+            </a:r>
+            <a:r>
+              <a:rPr lang="en-US" dirty="0" err="1"/>
+              <a:t>huggingface</a:t>
+            </a:r>
+            <a:r>
+              <a:rPr lang="en-US" dirty="0"/>
+              <a:t> implementation</a:t>
             </a:r>
           </a:p>
           <a:p>
@@ -8508,7 +9293,7 @@
             </a:r>
             <a:r>
               <a:rPr lang="en-US" dirty="0"/>
-              <a:t>='simple' to merge sub-tokens into coherent entities</a:t>
+              <a:t>='simple' to merge sub-tokens into entities</a:t>
             </a:r>
           </a:p>
           <a:p>
@@ -8600,6 +9385,12 @@
           <a:p>
             <a:r>
               <a:rPr lang="en-US" dirty="0"/>
+              <a:t>Hugging face implementation </a:t>
+            </a:r>
+          </a:p>
+          <a:p>
+            <a:r>
+              <a:rPr lang="en-US" dirty="0"/>
               <a:t>flair/</a:t>
             </a:r>
             <a:r>
@@ -8616,7 +9407,7 @@
             </a:r>
             <a:r>
               <a:rPr lang="en-US" dirty="0"/>
-              <a:t>-large: model based on contextual string embeddings and LSTM-CRF</a:t>
+              <a:t>-large: model based on contextual string embeddings and LSTM-CRF </a:t>
             </a:r>
           </a:p>
           <a:p>
@@ -8698,7 +9489,7 @@
           <p:cNvPr id="2" name="Title 1">
             <a:extLst>
               <a:ext uri="{FF2B5EF4-FFF2-40B4-BE49-F238E27FC236}">
-                <a16:creationId xmlns:a16="http://schemas.microsoft.com/office/drawing/2014/main" id="{4E4C7D5F-306B-5BE3-502F-D530DC747F9A}"/>
+                <a16:creationId xmlns:a16="http://schemas.microsoft.com/office/drawing/2014/main" id="{25656D23-FD4F-E499-ABCD-2AE337AC7B46}"/>
               </a:ext>
             </a:extLst>
           </p:cNvPr>
@@ -8715,10 +9506,9 @@
           <a:lstStyle/>
           <a:p>
             <a:r>
-              <a:rPr lang="en-US" dirty="0" err="1"/>
-              <a:t>SpaCy</a:t>
-            </a:r>
-            <a:endParaRPr lang="en-US" dirty="0"/>
+              <a:rPr lang="en-US" dirty="0"/>
+              <a:t>Rule-Based</a:t>
+            </a:r>
           </a:p>
         </p:txBody>
       </p:sp>
@@ -8727,7 +9517,7 @@
           <p:cNvPr id="3" name="Content Placeholder 2">
             <a:extLst>
               <a:ext uri="{FF2B5EF4-FFF2-40B4-BE49-F238E27FC236}">
-                <a16:creationId xmlns:a16="http://schemas.microsoft.com/office/drawing/2014/main" id="{706F5C72-7D77-128C-1796-65FCBF78FFAB}"/>
+                <a16:creationId xmlns:a16="http://schemas.microsoft.com/office/drawing/2014/main" id="{2257A480-CA9E-C264-7386-B11C48ADCEF1}"/>
               </a:ext>
             </a:extLst>
           </p:cNvPr>
@@ -8744,48 +9534,58 @@
           <a:lstStyle/>
           <a:p>
             <a:r>
+              <a:rPr lang="en-US" dirty="0"/>
+              <a:t>Built a deterministic system using </a:t>
+            </a:r>
+            <a:r>
               <a:rPr lang="en-US" dirty="0" err="1"/>
-              <a:t>de_core_news_md</a:t>
-            </a:r>
-            <a:endParaRPr lang="en-US" dirty="0"/>
-          </a:p>
-          <a:p>
+              <a:t>SpaCy’s</a:t>
+            </a:r>
             <a:r>
               <a:rPr lang="en-US" dirty="0"/>
-              <a:t>Handling large files: manually increased </a:t>
+              <a:t> </a:t>
             </a:r>
             <a:r>
               <a:rPr lang="en-US" dirty="0" err="1"/>
-              <a:t>nlp.max_length</a:t>
+              <a:t>EntityRuler</a:t>
             </a:r>
             <a:r>
               <a:rPr lang="en-US" dirty="0"/>
-              <a:t> to 3,000,000 characters to prevent overflow errors</a:t>
+              <a:t> combined with dynamic and static gazetteers</a:t>
             </a:r>
           </a:p>
           <a:p>
             <a:r>
               <a:rPr lang="en-US" dirty="0"/>
-              <a:t>Extracts entities by iterating over </a:t>
+              <a:t>A script fetches the current list of MPs live from the Austrian Parliament API to ensure up-to-date Person recognition</a:t>
+            </a:r>
+          </a:p>
+          <a:p>
+            <a:r>
+              <a:rPr lang="en-US" dirty="0"/>
+              <a:t>Implemented a _</a:t>
             </a:r>
             <a:r>
               <a:rPr lang="en-US" dirty="0" err="1"/>
-              <a:t>doc.ents</a:t>
+              <a:t>non_overlapping_spans</a:t>
             </a:r>
             <a:r>
               <a:rPr lang="en-US" dirty="0"/>
-              <a:t>, filtering only for PER and ORG labels</a:t>
-            </a:r>
-          </a:p>
-          <a:p>
-            <a:endParaRPr lang="en-US" dirty="0"/>
+              <a:t> function to strictly enforce that longer matches (e.g., full ministry names) take priority</a:t>
+            </a:r>
+          </a:p>
+          <a:p>
+            <a:r>
+              <a:rPr lang="en-US" dirty="0"/>
+              <a:t>Static lists were hardcoded for stable organizations</a:t>
+            </a:r>
           </a:p>
         </p:txBody>
       </p:sp>
     </p:spTree>
     <p:extLst>
       <p:ext uri="{BB962C8B-B14F-4D97-AF65-F5344CB8AC3E}">
-        <p14:creationId xmlns:p14="http://schemas.microsoft.com/office/powerpoint/2010/main" val="4071232228"/>
+        <p14:creationId xmlns:p14="http://schemas.microsoft.com/office/powerpoint/2010/main" val="503200733"/>
       </p:ext>
     </p:extLst>
   </p:cSld>
@@ -8817,7 +9617,7 @@
           <p:cNvPr id="2" name="Title 1">
             <a:extLst>
               <a:ext uri="{FF2B5EF4-FFF2-40B4-BE49-F238E27FC236}">
-                <a16:creationId xmlns:a16="http://schemas.microsoft.com/office/drawing/2014/main" id="{25656D23-FD4F-E499-ABCD-2AE337AC7B46}"/>
+                <a16:creationId xmlns:a16="http://schemas.microsoft.com/office/drawing/2014/main" id="{4E4C7D5F-306B-5BE3-502F-D530DC747F9A}"/>
               </a:ext>
             </a:extLst>
           </p:cNvPr>
@@ -8834,9 +9634,10 @@
           <a:lstStyle/>
           <a:p>
             <a:r>
-              <a:rPr lang="en-US" dirty="0"/>
-              <a:t>Rule-Based</a:t>
-            </a:r>
+              <a:rPr lang="en-US" dirty="0" err="1"/>
+              <a:t>SpaCy</a:t>
+            </a:r>
+            <a:endParaRPr lang="en-US" dirty="0"/>
           </a:p>
         </p:txBody>
       </p:sp>
@@ -8845,7 +9646,7 @@
           <p:cNvPr id="3" name="Content Placeholder 2">
             <a:extLst>
               <a:ext uri="{FF2B5EF4-FFF2-40B4-BE49-F238E27FC236}">
-                <a16:creationId xmlns:a16="http://schemas.microsoft.com/office/drawing/2014/main" id="{2257A480-CA9E-C264-7386-B11C48ADCEF1}"/>
+                <a16:creationId xmlns:a16="http://schemas.microsoft.com/office/drawing/2014/main" id="{706F5C72-7D77-128C-1796-65FCBF78FFAB}"/>
               </a:ext>
             </a:extLst>
           </p:cNvPr>
@@ -8862,58 +9663,34 @@
           <a:lstStyle/>
           <a:p>
             <a:r>
+              <a:rPr lang="en-US" dirty="0" err="1"/>
+              <a:t>de_core_news_md</a:t>
+            </a:r>
+            <a:endParaRPr lang="en-US" dirty="0"/>
+          </a:p>
+          <a:p>
+            <a:r>
               <a:rPr lang="en-US" dirty="0"/>
-              <a:t>Built a deterministic system using </a:t>
+              <a:t>Extracts entities by iterating over </a:t>
             </a:r>
             <a:r>
               <a:rPr lang="en-US" dirty="0" err="1"/>
-              <a:t>SpaCy’s</a:t>
+              <a:t>doc.ents</a:t>
             </a:r>
             <a:r>
               <a:rPr lang="en-US" dirty="0"/>
-              <a:t> </a:t>
-            </a:r>
-            <a:r>
-              <a:rPr lang="en-US" dirty="0" err="1"/>
-              <a:t>EntityRuler</a:t>
-            </a:r>
-            <a:r>
-              <a:rPr lang="en-US" dirty="0"/>
-              <a:t> combined with dynamic and static gazetteers</a:t>
-            </a:r>
-          </a:p>
-          <a:p>
-            <a:r>
-              <a:rPr lang="en-US" dirty="0"/>
-              <a:t>A script fetches the current list of MPs live from the Austrian Parliament API to ensure up-to-date Person recognition</a:t>
-            </a:r>
-          </a:p>
-          <a:p>
-            <a:r>
-              <a:rPr lang="en-US" dirty="0"/>
-              <a:t>Implemented a _</a:t>
-            </a:r>
-            <a:r>
-              <a:rPr lang="en-US" dirty="0" err="1"/>
-              <a:t>non_overlapping_spans</a:t>
-            </a:r>
-            <a:r>
-              <a:rPr lang="en-US" dirty="0"/>
-              <a:t> function to strictly enforce that longer matches (e.g., full ministry names) take priority</a:t>
-            </a:r>
-          </a:p>
-          <a:p>
-            <a:r>
-              <a:rPr lang="en-US" dirty="0"/>
-              <a:t>Static lists were hardcoded for stable organizations</a:t>
-            </a:r>
+              <a:t>, filtering only for PER and ORG labels</a:t>
+            </a:r>
+          </a:p>
+          <a:p>
+            <a:endParaRPr lang="en-US" dirty="0"/>
           </a:p>
         </p:txBody>
       </p:sp>
     </p:spTree>
     <p:extLst>
       <p:ext uri="{BB962C8B-B14F-4D97-AF65-F5344CB8AC3E}">
-        <p14:creationId xmlns:p14="http://schemas.microsoft.com/office/powerpoint/2010/main" val="503200733"/>
+        <p14:creationId xmlns:p14="http://schemas.microsoft.com/office/powerpoint/2010/main" val="4071232228"/>
       </p:ext>
     </p:extLst>
   </p:cSld>
@@ -8989,7 +9766,20 @@
           <a:bodyPr/>
           <a:lstStyle/>
           <a:p>
-            <a:endParaRPr lang="en-US"/>
+            <a:r>
+              <a:rPr lang="en-US" dirty="0"/>
+              <a:t>~15 hours per person</a:t>
+            </a:r>
+          </a:p>
+          <a:p>
+            <a:r>
+              <a:rPr lang="en-US" dirty="0"/>
+              <a:t>110 documents</a:t>
+            </a:r>
+          </a:p>
+          <a:p>
+            <a:pPr lvl="1"/>
+            <a:endParaRPr lang="en-US" dirty="0"/>
           </a:p>
         </p:txBody>
       </p:sp>
@@ -9028,7 +9818,7 @@
           <p:cNvPr id="2" name="Title 1">
             <a:extLst>
               <a:ext uri="{FF2B5EF4-FFF2-40B4-BE49-F238E27FC236}">
-                <a16:creationId xmlns:a16="http://schemas.microsoft.com/office/drawing/2014/main" id="{C3254D78-9B28-FD7C-4604-EC32EB30F658}"/>
+                <a16:creationId xmlns:a16="http://schemas.microsoft.com/office/drawing/2014/main" id="{944200E1-2635-870F-F443-3C547017B867}"/>
               </a:ext>
             </a:extLst>
           </p:cNvPr>
@@ -9045,12 +9835,8 @@
           <a:lstStyle/>
           <a:p>
             <a:r>
-              <a:rPr lang="en-US" dirty="0" err="1"/>
-              <a:t>SpaCy</a:t>
-            </a:r>
-            <a:r>
               <a:rPr lang="en-US" dirty="0"/>
-              <a:t> + Rules</a:t>
+              <a:t>Evaluation</a:t>
             </a:r>
           </a:p>
         </p:txBody>
@@ -9060,7 +9846,7 @@
           <p:cNvPr id="3" name="Content Placeholder 2">
             <a:extLst>
               <a:ext uri="{FF2B5EF4-FFF2-40B4-BE49-F238E27FC236}">
-                <a16:creationId xmlns:a16="http://schemas.microsoft.com/office/drawing/2014/main" id="{D17C41B8-5975-6BB8-1755-D6D2D00064AA}"/>
+                <a16:creationId xmlns:a16="http://schemas.microsoft.com/office/drawing/2014/main" id="{4CF95A48-446E-D7E7-5082-A11CB39BF556}"/>
               </a:ext>
             </a:extLst>
           </p:cNvPr>
@@ -9078,49 +9864,25 @@
           <a:p>
             <a:r>
               <a:rPr lang="en-US" dirty="0"/>
-              <a:t>Hybrid approach injects our custom </a:t>
-            </a:r>
-            <a:r>
-              <a:rPr lang="en-US" dirty="0" err="1"/>
-              <a:t>EntityRuler</a:t>
-            </a:r>
+              <a:t>Precision, Recall, Macro-F1 Score – calculated per label</a:t>
+            </a:r>
+          </a:p>
+          <a:p>
             <a:r>
               <a:rPr lang="en-US" dirty="0"/>
-              <a:t> component before the statistical </a:t>
-            </a:r>
-            <a:r>
-              <a:rPr lang="en-US" dirty="0" err="1"/>
-              <a:t>ner</a:t>
-            </a:r>
+              <a:t>Exact span matching: an entity is TP if start, end, and label match the ground truth perfectly</a:t>
+            </a:r>
+          </a:p>
+          <a:p>
             <a:r>
               <a:rPr lang="en-US" dirty="0"/>
-              <a:t> component in the pipeline</a:t>
+              <a:t>A custom script (evaluate_results.py) compares the JSON output of each model against the parsed XMI gold standard file</a:t>
             </a:r>
           </a:p>
           <a:p>
             <a:r>
               <a:rPr lang="en-US" dirty="0"/>
-              <a:t>Hard-coded patterns for known failures (e.g., "</a:t>
-            </a:r>
-            <a:r>
-              <a:rPr lang="en-US" dirty="0" err="1"/>
-              <a:t>Bundesministerium</a:t>
-            </a:r>
-            <a:r>
-              <a:rPr lang="en-US" dirty="0"/>
-              <a:t> für X") force the model to respect our domain knowledge first</a:t>
-            </a:r>
-          </a:p>
-          <a:p>
-            <a:r>
-              <a:rPr lang="en-US" dirty="0"/>
-              <a:t>Only predicts on the remaining text, effectively filling in the gaps left by the rules</a:t>
-            </a:r>
-          </a:p>
-          <a:p>
-            <a:r>
-              <a:rPr lang="en-US" dirty="0"/>
-              <a:t>Aims to fix high-frequency domain errors while keeping the generalization power of the machine learning model</a:t>
+              <a:t>Penalizes even partial matches, ensuring our models are precise on exact entity boundaries</a:t>
             </a:r>
           </a:p>
         </p:txBody>
@@ -9128,7 +9890,7 @@
     </p:spTree>
     <p:extLst>
       <p:ext uri="{BB962C8B-B14F-4D97-AF65-F5344CB8AC3E}">
-        <p14:creationId xmlns:p14="http://schemas.microsoft.com/office/powerpoint/2010/main" val="1148987645"/>
+        <p14:creationId xmlns:p14="http://schemas.microsoft.com/office/powerpoint/2010/main" val="1168996411"/>
       </p:ext>
     </p:extLst>
   </p:cSld>

--- a/NLP-Group18.pptx
+++ b/NLP-Group18.pptx
@@ -141,7 +141,7 @@
   <pc:docChgLst>
     <pc:chgData name="Sara Milla" userId="066c60c930f0ee7e" providerId="LiveId" clId="{F4F1AB15-4B12-4C7A-A7EC-7648ACBA0A6D}"/>
     <pc:docChg chg="undo custSel addSld delSld modSld sldOrd">
-      <pc:chgData name="Sara Milla" userId="066c60c930f0ee7e" providerId="LiveId" clId="{F4F1AB15-4B12-4C7A-A7EC-7648ACBA0A6D}" dt="2026-01-15T16:17:57.040" v="3909" actId="20577"/>
+      <pc:chgData name="Sara Milla" userId="066c60c930f0ee7e" providerId="LiveId" clId="{F4F1AB15-4B12-4C7A-A7EC-7648ACBA0A6D}" dt="2026-01-15T21:10:38.322" v="5500" actId="14100"/>
       <pc:docMkLst>
         <pc:docMk/>
       </pc:docMkLst>
@@ -256,7 +256,7 @@
         </pc:spChg>
       </pc:sldChg>
       <pc:sldChg chg="addSp delSp modSp new mod modNotesTx">
-        <pc:chgData name="Sara Milla" userId="066c60c930f0ee7e" providerId="LiveId" clId="{F4F1AB15-4B12-4C7A-A7EC-7648ACBA0A6D}" dt="2026-01-15T16:08:10.310" v="3888" actId="6549"/>
+        <pc:chgData name="Sara Milla" userId="066c60c930f0ee7e" providerId="LiveId" clId="{F4F1AB15-4B12-4C7A-A7EC-7648ACBA0A6D}" dt="2026-01-15T20:41:31.948" v="4573" actId="20577"/>
         <pc:sldMkLst>
           <pc:docMk/>
           <pc:sldMk cId="2278827070" sldId="257"/>
@@ -295,7 +295,7 @@
         </pc:graphicFrameChg>
       </pc:sldChg>
       <pc:sldChg chg="addSp delSp modSp new mod setBg delDesignElem modNotesTx">
-        <pc:chgData name="Sara Milla" userId="066c60c930f0ee7e" providerId="LiveId" clId="{F4F1AB15-4B12-4C7A-A7EC-7648ACBA0A6D}" dt="2026-01-15T16:08:32.078" v="3895" actId="27636"/>
+        <pc:chgData name="Sara Milla" userId="066c60c930f0ee7e" providerId="LiveId" clId="{F4F1AB15-4B12-4C7A-A7EC-7648ACBA0A6D}" dt="2026-01-15T21:07:38.045" v="5470" actId="20577"/>
         <pc:sldMkLst>
           <pc:docMk/>
           <pc:sldMk cId="742933904" sldId="258"/>
@@ -454,7 +454,7 @@
         </pc:cxnChg>
       </pc:sldChg>
       <pc:sldChg chg="addSp delSp modSp new mod setBg modClrScheme delDesignElem chgLayout modNotesTx">
-        <pc:chgData name="Sara Milla" userId="066c60c930f0ee7e" providerId="LiveId" clId="{F4F1AB15-4B12-4C7A-A7EC-7648ACBA0A6D}" dt="2026-01-15T16:09:10.988" v="3896" actId="26606"/>
+        <pc:chgData name="Sara Milla" userId="066c60c930f0ee7e" providerId="LiveId" clId="{F4F1AB15-4B12-4C7A-A7EC-7648ACBA0A6D}" dt="2026-01-15T21:10:38.322" v="5500" actId="14100"/>
         <pc:sldMkLst>
           <pc:docMk/>
           <pc:sldMk cId="761959663" sldId="259"/>
@@ -468,7 +468,7 @@
           </ac:spMkLst>
         </pc:spChg>
         <pc:spChg chg="mod ord">
-          <ac:chgData name="Sara Milla" userId="066c60c930f0ee7e" providerId="LiveId" clId="{F4F1AB15-4B12-4C7A-A7EC-7648ACBA0A6D}" dt="2026-01-15T15:07:56.897" v="2200" actId="26606"/>
+          <ac:chgData name="Sara Milla" userId="066c60c930f0ee7e" providerId="LiveId" clId="{F4F1AB15-4B12-4C7A-A7EC-7648ACBA0A6D}" dt="2026-01-15T21:10:38.322" v="5500" actId="14100"/>
           <ac:spMkLst>
             <pc:docMk/>
             <pc:sldMk cId="761959663" sldId="259"/>
@@ -778,13 +778,13 @@
         </pc:cxnChg>
       </pc:sldChg>
       <pc:sldChg chg="addSp delSp modSp new mod ord setBg delDesignElem modNotesTx">
-        <pc:chgData name="Sara Milla" userId="066c60c930f0ee7e" providerId="LiveId" clId="{F4F1AB15-4B12-4C7A-A7EC-7648ACBA0A6D}" dt="2026-01-15T15:55:41.624" v="3807" actId="26606"/>
+        <pc:chgData name="Sara Milla" userId="066c60c930f0ee7e" providerId="LiveId" clId="{F4F1AB15-4B12-4C7A-A7EC-7648ACBA0A6D}" dt="2026-01-15T21:08:11.384" v="5476" actId="20577"/>
         <pc:sldMkLst>
           <pc:docMk/>
           <pc:sldMk cId="4071232228" sldId="262"/>
         </pc:sldMkLst>
         <pc:spChg chg="mod">
-          <ac:chgData name="Sara Milla" userId="066c60c930f0ee7e" providerId="LiveId" clId="{F4F1AB15-4B12-4C7A-A7EC-7648ACBA0A6D}" dt="2026-01-15T15:55:33.224" v="3793" actId="26606"/>
+          <ac:chgData name="Sara Milla" userId="066c60c930f0ee7e" providerId="LiveId" clId="{F4F1AB15-4B12-4C7A-A7EC-7648ACBA0A6D}" dt="2026-01-15T21:08:11.384" v="5476" actId="20577"/>
           <ac:spMkLst>
             <pc:docMk/>
             <pc:sldMk cId="4071232228" sldId="262"/>
@@ -849,13 +849,13 @@
         </pc:grpChg>
       </pc:sldChg>
       <pc:sldChg chg="addSp delSp modSp new mod setBg delDesignElem modNotesTx">
-        <pc:chgData name="Sara Milla" userId="066c60c930f0ee7e" providerId="LiveId" clId="{F4F1AB15-4B12-4C7A-A7EC-7648ACBA0A6D}" dt="2026-01-15T16:04:32.346" v="3830" actId="26606"/>
+        <pc:chgData name="Sara Milla" userId="066c60c930f0ee7e" providerId="LiveId" clId="{F4F1AB15-4B12-4C7A-A7EC-7648ACBA0A6D}" dt="2026-01-15T21:08:18.892" v="5479" actId="20577"/>
         <pc:sldMkLst>
           <pc:docMk/>
           <pc:sldMk cId="2352599782" sldId="263"/>
         </pc:sldMkLst>
         <pc:spChg chg="mod">
-          <ac:chgData name="Sara Milla" userId="066c60c930f0ee7e" providerId="LiveId" clId="{F4F1AB15-4B12-4C7A-A7EC-7648ACBA0A6D}" dt="2026-01-15T16:04:32.346" v="3830" actId="26606"/>
+          <ac:chgData name="Sara Milla" userId="066c60c930f0ee7e" providerId="LiveId" clId="{F4F1AB15-4B12-4C7A-A7EC-7648ACBA0A6D}" dt="2026-01-15T21:08:16.825" v="5478" actId="20577"/>
           <ac:spMkLst>
             <pc:docMk/>
             <pc:sldMk cId="2352599782" sldId="263"/>
@@ -928,7 +928,7 @@
         </pc:picChg>
       </pc:sldChg>
       <pc:sldChg chg="modSp new mod ord modNotesTx">
-        <pc:chgData name="Sara Milla" userId="066c60c930f0ee7e" providerId="LiveId" clId="{F4F1AB15-4B12-4C7A-A7EC-7648ACBA0A6D}" dt="2026-01-15T15:55:39.605" v="3806"/>
+        <pc:chgData name="Sara Milla" userId="066c60c930f0ee7e" providerId="LiveId" clId="{F4F1AB15-4B12-4C7A-A7EC-7648ACBA0A6D}" dt="2026-01-15T21:08:36.975" v="5493" actId="20577"/>
         <pc:sldMkLst>
           <pc:docMk/>
           <pc:sldMk cId="1148987645" sldId="264"/>
@@ -1343,14 +1343,14 @@
           <pc:sldMk cId="3689668806" sldId="269"/>
         </pc:sldMkLst>
       </pc:sldChg>
-      <pc:sldChg chg="addSp delSp modSp add mod delDesignElem">
-        <pc:chgData name="Sara Milla" userId="066c60c930f0ee7e" providerId="LiveId" clId="{F4F1AB15-4B12-4C7A-A7EC-7648ACBA0A6D}" dt="2026-01-15T16:14:40.483" v="3899" actId="403"/>
+      <pc:sldChg chg="addSp delSp modSp add mod delDesignElem modNotesTx">
+        <pc:chgData name="Sara Milla" userId="066c60c930f0ee7e" providerId="LiveId" clId="{F4F1AB15-4B12-4C7A-A7EC-7648ACBA0A6D}" dt="2026-01-15T21:08:27.021" v="5492" actId="20577"/>
         <pc:sldMkLst>
           <pc:docMk/>
           <pc:sldMk cId="987714480" sldId="270"/>
         </pc:sldMkLst>
         <pc:spChg chg="mod">
-          <ac:chgData name="Sara Milla" userId="066c60c930f0ee7e" providerId="LiveId" clId="{F4F1AB15-4B12-4C7A-A7EC-7648ACBA0A6D}" dt="2026-01-15T16:14:30.351" v="3898" actId="26606"/>
+          <ac:chgData name="Sara Milla" userId="066c60c930f0ee7e" providerId="LiveId" clId="{F4F1AB15-4B12-4C7A-A7EC-7648ACBA0A6D}" dt="2026-01-15T21:08:23.061" v="5481" actId="20577"/>
           <ac:spMkLst>
             <pc:docMk/>
             <pc:sldMk cId="987714480" sldId="270"/>
@@ -7527,10 +7527,7 @@
           <a:bodyPr/>
           <a:lstStyle/>
           <a:p>
-            <a:r>
-              <a:rPr lang="en-US" dirty="0"/>
-              <a:t>Julia</a:t>
-            </a:r>
+            <a:endParaRPr lang="en-US" dirty="0"/>
           </a:p>
         </p:txBody>
       </p:sp>
@@ -7619,6 +7616,82 @@
               <a:t>Sara</a:t>
             </a:r>
           </a:p>
+          <a:p>
+            <a:r>
+              <a:rPr lang="en-US" dirty="0"/>
+              <a:t>-goal is to extract persons and organizations from the </a:t>
+            </a:r>
+            <a:r>
+              <a:rPr lang="en-US" dirty="0" err="1"/>
+              <a:t>gerparcor</a:t>
+            </a:r>
+            <a:r>
+              <a:rPr lang="en-US" dirty="0"/>
+              <a:t> </a:t>
+            </a:r>
+            <a:r>
+              <a:rPr lang="en-US" dirty="0" err="1"/>
+              <a:t>german</a:t>
+            </a:r>
+            <a:r>
+              <a:rPr lang="en-US" dirty="0"/>
+              <a:t> language parliamentary records</a:t>
+            </a:r>
+          </a:p>
+          <a:p>
+            <a:r>
+              <a:rPr lang="en-US" dirty="0"/>
+              <a:t>-preprocessing includes parsing the raw </a:t>
+            </a:r>
+            <a:r>
+              <a:rPr lang="en-US" dirty="0" err="1"/>
+              <a:t>xmi</a:t>
+            </a:r>
+            <a:r>
+              <a:rPr lang="en-US" dirty="0"/>
+              <a:t> documents, extracting the </a:t>
+            </a:r>
+            <a:r>
+              <a:rPr lang="en-US" dirty="0" err="1"/>
+              <a:t>sofaString</a:t>
+            </a:r>
+            <a:r>
+              <a:rPr lang="en-US" dirty="0"/>
+              <a:t> ,</a:t>
+            </a:r>
+          </a:p>
+          <a:p>
+            <a:r>
+              <a:rPr lang="en-US" dirty="0"/>
+              <a:t>-then iterating thought the specified </a:t>
+            </a:r>
+            <a:r>
+              <a:rPr lang="en-US" dirty="0" err="1"/>
+              <a:t>namespaced</a:t>
+            </a:r>
+            <a:r>
+              <a:rPr lang="en-US" dirty="0"/>
+              <a:t> tags to find entities, </a:t>
+            </a:r>
+          </a:p>
+          <a:p>
+            <a:r>
+              <a:rPr lang="en-US" dirty="0"/>
+              <a:t>-also extracting the start and end characters</a:t>
+            </a:r>
+          </a:p>
+          <a:p>
+            <a:r>
+              <a:rPr lang="en-US" dirty="0"/>
+              <a:t>-so the parser returns a clean dictionary containing the  raw text with a list of entity spans</a:t>
+            </a:r>
+          </a:p>
+          <a:p>
+            <a:endParaRPr lang="en-US" dirty="0"/>
+          </a:p>
+          <a:p>
+            <a:endParaRPr lang="en-US" dirty="0"/>
+          </a:p>
         </p:txBody>
       </p:sp>
       <p:sp>
@@ -7703,8 +7776,59 @@
           <a:p>
             <a:r>
               <a:rPr lang="en-US" dirty="0"/>
-              <a:t>Sara</a:t>
-            </a:r>
+              <a:t>-our pipeline imports all our model wrappers together into one workflow</a:t>
+            </a:r>
+          </a:p>
+          <a:p>
+            <a:r>
+              <a:rPr lang="en-US" dirty="0"/>
+              <a:t>-it initializes the </a:t>
+            </a:r>
+            <a:r>
+              <a:rPr lang="en-US" dirty="0" err="1"/>
+              <a:t>xmi</a:t>
+            </a:r>
+            <a:r>
+              <a:rPr lang="en-US" dirty="0"/>
+              <a:t> parser to handle the data reading </a:t>
+            </a:r>
+          </a:p>
+          <a:p>
+            <a:pPr marL="0" indent="0">
+              <a:buFontTx/>
+              <a:buNone/>
+            </a:pPr>
+            <a:r>
+              <a:rPr lang="en-US" dirty="0"/>
+              <a:t>-and organizes the models into a dictionary that maps each model name to its specific annotate method</a:t>
+            </a:r>
+          </a:p>
+          <a:p>
+            <a:pPr marL="0" indent="0">
+              <a:buFontTx/>
+              <a:buNone/>
+            </a:pPr>
+            <a:r>
+              <a:rPr lang="en-US" dirty="0"/>
+              <a:t>-the script iterates through the files and extracts the raw text and the ground truth entities</a:t>
+            </a:r>
+          </a:p>
+          <a:p>
+            <a:pPr marL="0" indent="0">
+              <a:buFontTx/>
+              <a:buNone/>
+            </a:pPr>
+            <a:r>
+              <a:rPr lang="en-US" dirty="0"/>
+              <a:t>-then passes this text to each model</a:t>
+            </a:r>
+          </a:p>
+          <a:p>
+            <a:pPr marL="0" indent="0">
+              <a:buFontTx/>
+              <a:buNone/>
+            </a:pPr>
+            <a:endParaRPr lang="en-US" dirty="0"/>
           </a:p>
         </p:txBody>
       </p:sp>
@@ -7811,19 +7935,25 @@
             </a:r>
             <a:r>
               <a:rPr lang="en-US" dirty="0"/>
-              <a:t>process</a:t>
+              <a:t>process so we don’t process the whole text at once</a:t>
             </a:r>
           </a:p>
           <a:p>
             <a:r>
               <a:rPr lang="en-US" dirty="0"/>
-              <a:t>-splits the text into 2000 char blocks with a 100 character overlap</a:t>
+              <a:t>-splits the text into 2000 char blocks with a 100 character overlap to make sure we don’t cut an entity in half</a:t>
             </a:r>
           </a:p>
           <a:p>
             <a:r>
               <a:rPr lang="en-US" dirty="0"/>
-              <a:t>-The pipeline predicts entities within each chunk, and the code filters these results to retain only those categorized as persons or organizations.</a:t>
+              <a:t>-The pipeline predicts entities within each chunk, and the code filters these results to retain only those categorized as persons or organizations</a:t>
+            </a:r>
+          </a:p>
+          <a:p>
+            <a:r>
+              <a:rPr lang="en-US" dirty="0"/>
+              <a:t>-it also calculates the start and end points relative to the original document and makes sure that there are no duplicate entities from the overlap</a:t>
             </a:r>
           </a:p>
         </p:txBody>
@@ -8171,7 +8301,7 @@
           <a:p>
             <a:r>
               <a:rPr lang="en-US" dirty="0"/>
-              <a:t>Julia, Valentina</a:t>
+              <a:t>Valentina</a:t>
             </a:r>
           </a:p>
         </p:txBody>
@@ -8276,7 +8406,7 @@
           <a:p>
             <a:r>
               <a:rPr lang="en-US" dirty="0"/>
-              <a:t>Julia, Valentina</a:t>
+              <a:t>Julia</a:t>
             </a:r>
           </a:p>
         </p:txBody>
@@ -14100,29 +14230,7 @@
           <a:p>
             <a:r>
               <a:rPr lang="en-US" sz="2400" dirty="0"/>
-              <a:t>Sub-word tokenization handled via </a:t>
-            </a:r>
-            <a:r>
-              <a:rPr lang="en-US" sz="2400" dirty="0" err="1"/>
-              <a:t>huggingface</a:t>
-            </a:r>
-            <a:r>
-              <a:rPr lang="en-US" sz="2400" dirty="0"/>
-              <a:t> implementation</a:t>
-            </a:r>
-          </a:p>
-          <a:p>
-            <a:r>
-              <a:rPr lang="en-US" sz="2400" dirty="0"/>
-              <a:t>Uses </a:t>
-            </a:r>
-            <a:r>
-              <a:rPr lang="en-US" sz="2400" dirty="0" err="1"/>
-              <a:t>aggregation_strategy</a:t>
-            </a:r>
-            <a:r>
-              <a:rPr lang="en-US" sz="2400" dirty="0"/>
-              <a:t>='simple' to merge sub-tokens into entities</a:t>
+              <a:t>Sub-word tokenization handled with hugging face</a:t>
             </a:r>
           </a:p>
           <a:p>
@@ -15142,9 +15250,10 @@
           <a:lstStyle/>
           <a:p>
             <a:r>
-              <a:rPr lang="en-US" sz="5400"/>
-              <a:t>SpaCy Julia</a:t>
-            </a:r>
+              <a:rPr lang="en-US" sz="5400" dirty="0" err="1"/>
+              <a:t>SpaCy</a:t>
+            </a:r>
+            <a:endParaRPr lang="en-US" sz="5400" dirty="0"/>
           </a:p>
         </p:txBody>
       </p:sp>
@@ -15566,8 +15675,8 @@
           <a:lstStyle/>
           <a:p>
             <a:r>
-              <a:rPr lang="en-US" sz="5000"/>
-              <a:t>Manual Annotation V</a:t>
+              <a:rPr lang="en-US" sz="5000" dirty="0"/>
+              <a:t>Manual Annotation</a:t>
             </a:r>
           </a:p>
         </p:txBody>
@@ -16103,8 +16212,8 @@
           <a:lstStyle/>
           <a:p>
             <a:r>
-              <a:rPr lang="en-US" sz="5400"/>
-              <a:t>Manual Annotation Challenges J</a:t>
+              <a:rPr lang="en-US" sz="5400" dirty="0"/>
+              <a:t>Manual Annotation Challenges</a:t>
             </a:r>
           </a:p>
         </p:txBody>

--- a/NLP-Group18.pptx
+++ b/NLP-Group18.pptx
@@ -6760,7 +6760,7 @@
           <a:p>
             <a:fld id="{AC48ED49-0C8E-493D-9073-2686AA266E1A}" type="datetimeFigureOut">
               <a:rPr lang="en-US" smtClean="0"/>
-              <a:t>1/15/2026</a:t>
+              <a:t>1/16/2026</a:t>
             </a:fld>
             <a:endParaRPr lang="en-US"/>
           </a:p>
@@ -6918,7 +6918,7 @@
           <a:p>
             <a:fld id="{3995E981-1EFA-47B5-8159-159ED2728D9A}" type="slidenum">
               <a:rPr lang="en-US" smtClean="0"/>
-              <a:t>‹#›</a:t>
+              <a:t>‹Nr.›</a:t>
             </a:fld>
             <a:endParaRPr lang="en-US"/>
           </a:p>
@@ -8584,7 +8584,7 @@
           <a:p>
             <a:fld id="{A35C02C4-59AA-486A-B0DF-96F10EC02CBF}" type="datetimeFigureOut">
               <a:rPr lang="en-US" smtClean="0"/>
-              <a:t>1/15/2026</a:t>
+              <a:t>1/16/2026</a:t>
             </a:fld>
             <a:endParaRPr lang="en-US"/>
           </a:p>
@@ -8626,7 +8626,7 @@
           <a:p>
             <a:fld id="{6ABDC873-C5B2-452C-A1CA-635559D117C2}" type="slidenum">
               <a:rPr lang="en-US" smtClean="0"/>
-              <a:t>‹#›</a:t>
+              <a:t>‹Nr.›</a:t>
             </a:fld>
             <a:endParaRPr lang="en-US"/>
           </a:p>
@@ -8754,7 +8754,7 @@
           <a:p>
             <a:fld id="{A35C02C4-59AA-486A-B0DF-96F10EC02CBF}" type="datetimeFigureOut">
               <a:rPr lang="en-US" smtClean="0"/>
-              <a:t>1/15/2026</a:t>
+              <a:t>1/16/2026</a:t>
             </a:fld>
             <a:endParaRPr lang="en-US"/>
           </a:p>
@@ -8796,7 +8796,7 @@
           <a:p>
             <a:fld id="{6ABDC873-C5B2-452C-A1CA-635559D117C2}" type="slidenum">
               <a:rPr lang="en-US" smtClean="0"/>
-              <a:t>‹#›</a:t>
+              <a:t>‹Nr.›</a:t>
             </a:fld>
             <a:endParaRPr lang="en-US"/>
           </a:p>
@@ -8934,7 +8934,7 @@
           <a:p>
             <a:fld id="{A35C02C4-59AA-486A-B0DF-96F10EC02CBF}" type="datetimeFigureOut">
               <a:rPr lang="en-US" smtClean="0"/>
-              <a:t>1/15/2026</a:t>
+              <a:t>1/16/2026</a:t>
             </a:fld>
             <a:endParaRPr lang="en-US"/>
           </a:p>
@@ -8976,7 +8976,7 @@
           <a:p>
             <a:fld id="{6ABDC873-C5B2-452C-A1CA-635559D117C2}" type="slidenum">
               <a:rPr lang="en-US" smtClean="0"/>
-              <a:t>‹#›</a:t>
+              <a:t>‹Nr.›</a:t>
             </a:fld>
             <a:endParaRPr lang="en-US"/>
           </a:p>
@@ -9104,7 +9104,7 @@
           <a:p>
             <a:fld id="{A35C02C4-59AA-486A-B0DF-96F10EC02CBF}" type="datetimeFigureOut">
               <a:rPr lang="en-US" smtClean="0"/>
-              <a:t>1/15/2026</a:t>
+              <a:t>1/16/2026</a:t>
             </a:fld>
             <a:endParaRPr lang="en-US"/>
           </a:p>
@@ -9146,7 +9146,7 @@
           <a:p>
             <a:fld id="{6ABDC873-C5B2-452C-A1CA-635559D117C2}" type="slidenum">
               <a:rPr lang="en-US" smtClean="0"/>
-              <a:t>‹#›</a:t>
+              <a:t>‹Nr.›</a:t>
             </a:fld>
             <a:endParaRPr lang="en-US"/>
           </a:p>
@@ -9350,7 +9350,7 @@
           <a:p>
             <a:fld id="{A35C02C4-59AA-486A-B0DF-96F10EC02CBF}" type="datetimeFigureOut">
               <a:rPr lang="en-US" smtClean="0"/>
-              <a:t>1/15/2026</a:t>
+              <a:t>1/16/2026</a:t>
             </a:fld>
             <a:endParaRPr lang="en-US"/>
           </a:p>
@@ -9392,7 +9392,7 @@
           <a:p>
             <a:fld id="{6ABDC873-C5B2-452C-A1CA-635559D117C2}" type="slidenum">
               <a:rPr lang="en-US" smtClean="0"/>
-              <a:t>‹#›</a:t>
+              <a:t>‹Nr.›</a:t>
             </a:fld>
             <a:endParaRPr lang="en-US"/>
           </a:p>
@@ -9582,7 +9582,7 @@
           <a:p>
             <a:fld id="{A35C02C4-59AA-486A-B0DF-96F10EC02CBF}" type="datetimeFigureOut">
               <a:rPr lang="en-US" smtClean="0"/>
-              <a:t>1/15/2026</a:t>
+              <a:t>1/16/2026</a:t>
             </a:fld>
             <a:endParaRPr lang="en-US"/>
           </a:p>
@@ -9624,7 +9624,7 @@
           <a:p>
             <a:fld id="{6ABDC873-C5B2-452C-A1CA-635559D117C2}" type="slidenum">
               <a:rPr lang="en-US" smtClean="0"/>
-              <a:t>‹#›</a:t>
+              <a:t>‹Nr.›</a:t>
             </a:fld>
             <a:endParaRPr lang="en-US"/>
           </a:p>
@@ -9949,7 +9949,7 @@
           <a:p>
             <a:fld id="{A35C02C4-59AA-486A-B0DF-96F10EC02CBF}" type="datetimeFigureOut">
               <a:rPr lang="en-US" smtClean="0"/>
-              <a:t>1/15/2026</a:t>
+              <a:t>1/16/2026</a:t>
             </a:fld>
             <a:endParaRPr lang="en-US"/>
           </a:p>
@@ -9991,7 +9991,7 @@
           <a:p>
             <a:fld id="{6ABDC873-C5B2-452C-A1CA-635559D117C2}" type="slidenum">
               <a:rPr lang="en-US" smtClean="0"/>
-              <a:t>‹#›</a:t>
+              <a:t>‹Nr.›</a:t>
             </a:fld>
             <a:endParaRPr lang="en-US"/>
           </a:p>
@@ -10067,7 +10067,7 @@
           <a:p>
             <a:fld id="{A35C02C4-59AA-486A-B0DF-96F10EC02CBF}" type="datetimeFigureOut">
               <a:rPr lang="en-US" smtClean="0"/>
-              <a:t>1/15/2026</a:t>
+              <a:t>1/16/2026</a:t>
             </a:fld>
             <a:endParaRPr lang="en-US"/>
           </a:p>
@@ -10109,7 +10109,7 @@
           <a:p>
             <a:fld id="{6ABDC873-C5B2-452C-A1CA-635559D117C2}" type="slidenum">
               <a:rPr lang="en-US" smtClean="0"/>
-              <a:t>‹#›</a:t>
+              <a:t>‹Nr.›</a:t>
             </a:fld>
             <a:endParaRPr lang="en-US"/>
           </a:p>
@@ -10162,7 +10162,7 @@
           <a:p>
             <a:fld id="{A35C02C4-59AA-486A-B0DF-96F10EC02CBF}" type="datetimeFigureOut">
               <a:rPr lang="en-US" smtClean="0"/>
-              <a:t>1/15/2026</a:t>
+              <a:t>1/16/2026</a:t>
             </a:fld>
             <a:endParaRPr lang="en-US"/>
           </a:p>
@@ -10204,7 +10204,7 @@
           <a:p>
             <a:fld id="{6ABDC873-C5B2-452C-A1CA-635559D117C2}" type="slidenum">
               <a:rPr lang="en-US" smtClean="0"/>
-              <a:t>‹#›</a:t>
+              <a:t>‹Nr.›</a:t>
             </a:fld>
             <a:endParaRPr lang="en-US"/>
           </a:p>
@@ -10439,7 +10439,7 @@
           <a:p>
             <a:fld id="{A35C02C4-59AA-486A-B0DF-96F10EC02CBF}" type="datetimeFigureOut">
               <a:rPr lang="en-US" smtClean="0"/>
-              <a:t>1/15/2026</a:t>
+              <a:t>1/16/2026</a:t>
             </a:fld>
             <a:endParaRPr lang="en-US"/>
           </a:p>
@@ -10481,7 +10481,7 @@
           <a:p>
             <a:fld id="{6ABDC873-C5B2-452C-A1CA-635559D117C2}" type="slidenum">
               <a:rPr lang="en-US" smtClean="0"/>
-              <a:t>‹#›</a:t>
+              <a:t>‹Nr.›</a:t>
             </a:fld>
             <a:endParaRPr lang="en-US"/>
           </a:p>
@@ -10696,7 +10696,7 @@
           <a:p>
             <a:fld id="{A35C02C4-59AA-486A-B0DF-96F10EC02CBF}" type="datetimeFigureOut">
               <a:rPr lang="en-US" smtClean="0"/>
-              <a:t>1/15/2026</a:t>
+              <a:t>1/16/2026</a:t>
             </a:fld>
             <a:endParaRPr lang="en-US"/>
           </a:p>
@@ -10738,7 +10738,7 @@
           <a:p>
             <a:fld id="{6ABDC873-C5B2-452C-A1CA-635559D117C2}" type="slidenum">
               <a:rPr lang="en-US" smtClean="0"/>
-              <a:t>‹#›</a:t>
+              <a:t>‹Nr.›</a:t>
             </a:fld>
             <a:endParaRPr lang="en-US"/>
           </a:p>
@@ -10909,7 +10909,7 @@
           <a:p>
             <a:fld id="{A35C02C4-59AA-486A-B0DF-96F10EC02CBF}" type="datetimeFigureOut">
               <a:rPr lang="en-US" smtClean="0"/>
-              <a:t>1/15/2026</a:t>
+              <a:t>1/16/2026</a:t>
             </a:fld>
             <a:endParaRPr lang="en-US"/>
           </a:p>
@@ -10987,7 +10987,7 @@
           <a:p>
             <a:fld id="{6ABDC873-C5B2-452C-A1CA-635559D117C2}" type="slidenum">
               <a:rPr lang="en-US" smtClean="0"/>
-              <a:t>‹#›</a:t>
+              <a:t>‹Nr.›</a:t>
             </a:fld>
             <a:endParaRPr lang="en-US"/>
           </a:p>
@@ -12011,19 +12011,27 @@
         </p:spPr>
         <p:txBody>
           <a:bodyPr anchor="t">
-            <a:normAutofit lnSpcReduction="10000"/>
+            <a:normAutofit/>
           </a:bodyPr>
           <a:lstStyle/>
           <a:p>
             <a:r>
               <a:rPr lang="en-US" sz="2000" dirty="0"/>
-              <a:t>Precision, Recall, Macro-F1 Score – calculated per label</a:t>
-            </a:r>
-          </a:p>
-          <a:p>
+              <a:t>Precision, Recall, F1, Macro-F1 </a:t>
+            </a:r>
+            <a:r>
+              <a:rPr lang="en-US" sz="2000"/>
+              <a:t>Score </a:t>
+            </a:r>
+          </a:p>
+          <a:p>
+            <a:r>
+              <a:rPr lang="en-US" sz="2000"/>
+              <a:t>Exact </a:t>
+            </a:r>
             <a:r>
               <a:rPr lang="en-US" sz="2000" dirty="0"/>
-              <a:t>Exact span matching: an entity is TP if start, end, and label match the ground truth perfectly</a:t>
+              <a:t>span matching: an entity is TP if start, end, and label match the ground truth perfectly</a:t>
             </a:r>
           </a:p>
           <a:p>
